--- a/docs/samples/demo_v1.pptx
+++ b/docs/samples/demo_v1.pptx
@@ -8,9 +8,6 @@
     <p:sldId id="256" r:id="rId7"/>
     <p:sldId id="257" r:id="rId8"/>
     <p:sldId id="258" r:id="rId9"/>
-    <p:sldId id="259" r:id="rId10"/>
-    <p:sldId id="260" r:id="rId11"/>
-    <p:sldId id="261" r:id="rId12"/>
   </p:sldIdLst>
   <p:sldSz cx="12191695" cy="6858000" type="screen4x3"/>
   <p:notesSz cx="6858000" cy="9144000"/>
@@ -3137,16 +3134,154 @@
           </a:p>
         </p:txBody>
       </p:sp>
-      <p:sp>
-        <p:nvSpPr>
-          <p:cNvPr id="3" name="Rectangle 2"/>
+      <p:pic>
+        <p:nvPicPr>
+          <p:cNvPr id="3" name="Picture 2" descr="_cover_graphic.png"/>
+          <p:cNvPicPr>
+            <a:picLocks noChangeAspect="1"/>
+          </p:cNvPicPr>
+          <p:nvPr/>
+        </p:nvPicPr>
+        <p:blipFill>
+          <a:blip r:embed="rId2"/>
+          <a:stretch>
+            <a:fillRect/>
+          </a:stretch>
+        </p:blipFill>
+        <p:spPr>
+          <a:xfrm>
+            <a:off x="6903720" y="0"/>
+            <a:ext cx="5609844" cy="6858000"/>
+          </a:xfrm>
+          <a:prstGeom prst="rect">
+            <a:avLst/>
+          </a:prstGeom>
+        </p:spPr>
+      </p:pic>
+      <p:sp>
+        <p:nvSpPr>
+          <p:cNvPr id="4" name="Rectangle 3"/>
           <p:cNvSpPr/>
           <p:nvPr/>
         </p:nvSpPr>
         <p:spPr>
           <a:xfrm>
-            <a:off x="8138160" y="0"/>
-            <a:ext cx="4069080" cy="6858000"/>
+            <a:off x="6858000" y="0"/>
+            <a:ext cx="50292" cy="6858000"/>
+          </a:xfrm>
+          <a:prstGeom prst="rect">
+            <a:avLst/>
+          </a:prstGeom>
+          <a:solidFill>
+            <a:srgbClr val="FDF6E6"/>
+          </a:solidFill>
+          <a:ln>
+            <a:noFill/>
+          </a:ln>
+          <a:effectLst/>
+        </p:spPr>
+        <p:style>
+          <a:lnRef idx="1">
+            <a:schemeClr val="accent1"/>
+          </a:lnRef>
+          <a:fillRef idx="3">
+            <a:schemeClr val="accent1"/>
+          </a:fillRef>
+          <a:effectRef idx="2">
+            <a:schemeClr val="accent1"/>
+          </a:effectRef>
+          <a:fontRef idx="minor">
+            <a:schemeClr val="lt1"/>
+          </a:fontRef>
+        </p:style>
+        <p:txBody>
+          <a:bodyPr rtlCol="0" anchor="ctr"/>
+          <a:lstStyle/>
+          <a:p>
+            <a:pPr algn="ctr"/>
+          </a:p>
+        </p:txBody>
+      </p:sp>
+      <p:sp>
+        <p:nvSpPr>
+          <p:cNvPr id="5" name="TextBox 4"/>
+          <p:cNvSpPr txBox="1"/>
+          <p:nvPr/>
+        </p:nvSpPr>
+        <p:spPr>
+          <a:xfrm>
+            <a:off x="868680" y="1143000"/>
+            <a:ext cx="5669280" cy="365760"/>
+          </a:xfrm>
+          <a:prstGeom prst="rect">
+            <a:avLst/>
+          </a:prstGeom>
+          <a:noFill/>
+        </p:spPr>
+        <p:txBody>
+          <a:bodyPr wrap="square">
+            <a:spAutoFit/>
+          </a:bodyPr>
+          <a:lstStyle/>
+          <a:p>
+            <a:pPr algn="l"/>
+            <a:r>
+              <a:rPr sz="1250" b="1">
+                <a:solidFill>
+                  <a:srgbClr val="9E2A25"/>
+                </a:solidFill>
+                <a:latin typeface="Microsoft YaHei"/>
+              </a:rPr>
+              <a:t>MINIMAX CODE  ·  MAVIS  SKILL</a:t>
+            </a:r>
+          </a:p>
+        </p:txBody>
+      </p:sp>
+      <p:sp>
+        <p:nvSpPr>
+          <p:cNvPr id="6" name="TextBox 5"/>
+          <p:cNvSpPr txBox="1"/>
+          <p:nvPr/>
+        </p:nvSpPr>
+        <p:spPr>
+          <a:xfrm>
+            <a:off x="868680" y="1645920"/>
+            <a:ext cx="5852160" cy="1783080"/>
+          </a:xfrm>
+          <a:prstGeom prst="rect">
+            <a:avLst/>
+          </a:prstGeom>
+          <a:noFill/>
+        </p:spPr>
+        <p:txBody>
+          <a:bodyPr wrap="square">
+            <a:spAutoFit/>
+          </a:bodyPr>
+          <a:lstStyle/>
+          <a:p>
+            <a:pPr algn="l"/>
+            <a:r>
+              <a:rPr sz="5200" b="1">
+                <a:solidFill>
+                  <a:srgbClr val="FFFFFF"/>
+                </a:solidFill>
+                <a:latin typeface="Microsoft YaHei"/>
+              </a:rPr>
+              <a:t>版本对比交付</a:t>
+            </a:r>
+          </a:p>
+        </p:txBody>
+      </p:sp>
+      <p:sp>
+        <p:nvSpPr>
+          <p:cNvPr id="7" name="Rectangle 6"/>
+          <p:cNvSpPr/>
+          <p:nvPr/>
+        </p:nvSpPr>
+        <p:spPr>
+          <a:xfrm>
+            <a:off x="868680" y="3520440"/>
+            <a:ext cx="1280160" cy="45720"/>
           </a:xfrm>
           <a:prstGeom prst="rect">
             <a:avLst/>
@@ -3183,58 +3318,14 @@
       </p:sp>
       <p:sp>
         <p:nvSpPr>
-          <p:cNvPr id="4" name="Rectangle 3"/>
-          <p:cNvSpPr/>
-          <p:nvPr/>
-        </p:nvSpPr>
-        <p:spPr>
-          <a:xfrm>
-            <a:off x="8101583" y="0"/>
-            <a:ext cx="45720" cy="6858000"/>
-          </a:xfrm>
-          <a:prstGeom prst="rect">
-            <a:avLst/>
-          </a:prstGeom>
-          <a:solidFill>
-            <a:srgbClr val="FDF6E6"/>
-          </a:solidFill>
-          <a:ln>
-            <a:noFill/>
-          </a:ln>
-          <a:effectLst/>
-        </p:spPr>
-        <p:style>
-          <a:lnRef idx="1">
-            <a:schemeClr val="accent1"/>
-          </a:lnRef>
-          <a:fillRef idx="3">
-            <a:schemeClr val="accent1"/>
-          </a:fillRef>
-          <a:effectRef idx="2">
-            <a:schemeClr val="accent1"/>
-          </a:effectRef>
-          <a:fontRef idx="minor">
-            <a:schemeClr val="lt1"/>
-          </a:fontRef>
-        </p:style>
-        <p:txBody>
-          <a:bodyPr rtlCol="0" anchor="ctr"/>
-          <a:lstStyle/>
-          <a:p>
-            <a:pPr algn="ctr"/>
-          </a:p>
-        </p:txBody>
-      </p:sp>
-      <p:sp>
-        <p:nvSpPr>
-          <p:cNvPr id="5" name="TextBox 4"/>
+          <p:cNvPr id="8" name="TextBox 7"/>
           <p:cNvSpPr txBox="1"/>
           <p:nvPr/>
         </p:nvSpPr>
         <p:spPr>
           <a:xfrm>
-            <a:off x="822960" y="1920240"/>
-            <a:ext cx="6949440" cy="1005840"/>
+            <a:off x="868680" y="3822191"/>
+            <a:ext cx="5669280" cy="548640"/>
           </a:xfrm>
           <a:prstGeom prst="rect">
             <a:avLst/>
@@ -3249,42 +3340,7 @@
           <a:p>
             <a:pPr algn="l"/>
             <a:r>
-              <a:rPr sz="4000" b="1">
-                <a:solidFill>
-                  <a:srgbClr val="FFFFFF"/>
-                </a:solidFill>
-                <a:latin typeface="Microsoft YaHei"/>
-              </a:rPr>
-              <a:t>版本对比交付 Skill</a:t>
-            </a:r>
-          </a:p>
-        </p:txBody>
-      </p:sp>
-      <p:sp>
-        <p:nvSpPr>
-          <p:cNvPr id="6" name="TextBox 5"/>
-          <p:cNvSpPr txBox="1"/>
-          <p:nvPr/>
-        </p:nvSpPr>
-        <p:spPr>
-          <a:xfrm>
-            <a:off x="868680" y="2971800"/>
-            <a:ext cx="6583680" cy="548640"/>
-          </a:xfrm>
-          <a:prstGeom prst="rect">
-            <a:avLst/>
-          </a:prstGeom>
-          <a:noFill/>
-        </p:spPr>
-        <p:txBody>
-          <a:bodyPr wrap="square">
-            <a:spAutoFit/>
-          </a:bodyPr>
-          <a:lstStyle/>
-          <a:p>
-            <a:pPr algn="l"/>
-            <a:r>
-              <a:rPr sz="1800" b="0">
+              <a:rPr sz="2100" b="0">
                 <a:solidFill>
                   <a:srgbClr val="C9D4E0"/>
                 </a:solidFill>
@@ -3297,14 +3353,58 @@
       </p:sp>
       <p:sp>
         <p:nvSpPr>
-          <p:cNvPr id="7" name="TextBox 6"/>
+          <p:cNvPr id="9" name="Rectangle 8"/>
+          <p:cNvSpPr/>
+          <p:nvPr/>
+        </p:nvSpPr>
+        <p:spPr>
+          <a:xfrm>
+            <a:off x="868680" y="4617720"/>
+            <a:ext cx="1298448" cy="402336"/>
+          </a:xfrm>
+          <a:prstGeom prst="rect">
+            <a:avLst/>
+          </a:prstGeom>
+          <a:noFill/>
+          <a:ln w="12700">
+            <a:solidFill>
+              <a:srgbClr val="465A70"/>
+            </a:solidFill>
+          </a:ln>
+          <a:effectLst/>
+        </p:spPr>
+        <p:style>
+          <a:lnRef idx="1">
+            <a:schemeClr val="accent1"/>
+          </a:lnRef>
+          <a:fillRef idx="3">
+            <a:schemeClr val="accent1"/>
+          </a:fillRef>
+          <a:effectRef idx="2">
+            <a:schemeClr val="accent1"/>
+          </a:effectRef>
+          <a:fontRef idx="minor">
+            <a:schemeClr val="lt1"/>
+          </a:fontRef>
+        </p:style>
+        <p:txBody>
+          <a:bodyPr rtlCol="0" anchor="ctr"/>
+          <a:lstStyle/>
+          <a:p>
+            <a:pPr algn="ctr"/>
+          </a:p>
+        </p:txBody>
+      </p:sp>
+      <p:sp>
+        <p:nvSpPr>
+          <p:cNvPr id="10" name="TextBox 9"/>
           <p:cNvSpPr txBox="1"/>
           <p:nvPr/>
         </p:nvSpPr>
         <p:spPr>
           <a:xfrm>
-            <a:off x="868680" y="3977639"/>
-            <a:ext cx="6583680" cy="457200"/>
+            <a:off x="868680" y="4718304"/>
+            <a:ext cx="1298448" cy="274320"/>
           </a:xfrm>
           <a:prstGeom prst="rect">
             <a:avLst/>
@@ -3317,15 +3417,208 @@
           </a:bodyPr>
           <a:lstStyle/>
           <a:p>
-            <a:pPr algn="l"/>
-            <a:r>
-              <a:rPr sz="1300" b="0">
+            <a:pPr algn="ctr"/>
+            <a:r>
+              <a:rPr sz="1250" b="0">
                 <a:solidFill>
-                  <a:srgbClr val="8E9EB0"/>
+                  <a:srgbClr val="C9D4E0"/>
                 </a:solidFill>
                 <a:latin typeface="Microsoft YaHei"/>
               </a:rPr>
-              <a:t>MiniMax Code / Mavis  ·  version-diff-delivery</a:t>
+              <a:t>原版不动</a:t>
+            </a:r>
+          </a:p>
+        </p:txBody>
+      </p:sp>
+      <p:sp>
+        <p:nvSpPr>
+          <p:cNvPr id="11" name="Rectangle 10"/>
+          <p:cNvSpPr/>
+          <p:nvPr/>
+        </p:nvSpPr>
+        <p:spPr>
+          <a:xfrm>
+            <a:off x="2350008" y="4617720"/>
+            <a:ext cx="1298448" cy="402336"/>
+          </a:xfrm>
+          <a:prstGeom prst="rect">
+            <a:avLst/>
+          </a:prstGeom>
+          <a:noFill/>
+          <a:ln w="12700">
+            <a:solidFill>
+              <a:srgbClr val="465A70"/>
+            </a:solidFill>
+          </a:ln>
+          <a:effectLst/>
+        </p:spPr>
+        <p:style>
+          <a:lnRef idx="1">
+            <a:schemeClr val="accent1"/>
+          </a:lnRef>
+          <a:fillRef idx="3">
+            <a:schemeClr val="accent1"/>
+          </a:fillRef>
+          <a:effectRef idx="2">
+            <a:schemeClr val="accent1"/>
+          </a:effectRef>
+          <a:fontRef idx="minor">
+            <a:schemeClr val="lt1"/>
+          </a:fontRef>
+        </p:style>
+        <p:txBody>
+          <a:bodyPr rtlCol="0" anchor="ctr"/>
+          <a:lstStyle/>
+          <a:p>
+            <a:pPr algn="ctr"/>
+          </a:p>
+        </p:txBody>
+      </p:sp>
+      <p:sp>
+        <p:nvSpPr>
+          <p:cNvPr id="12" name="TextBox 11"/>
+          <p:cNvSpPr txBox="1"/>
+          <p:nvPr/>
+        </p:nvSpPr>
+        <p:spPr>
+          <a:xfrm>
+            <a:off x="2350008" y="4718304"/>
+            <a:ext cx="1298448" cy="274320"/>
+          </a:xfrm>
+          <a:prstGeom prst="rect">
+            <a:avLst/>
+          </a:prstGeom>
+          <a:noFill/>
+        </p:spPr>
+        <p:txBody>
+          <a:bodyPr wrap="square">
+            <a:spAutoFit/>
+          </a:bodyPr>
+          <a:lstStyle/>
+          <a:p>
+            <a:pPr algn="ctr"/>
+            <a:r>
+              <a:rPr sz="1250" b="0">
+                <a:solidFill>
+                  <a:srgbClr val="C9D4E0"/>
+                </a:solidFill>
+                <a:latin typeface="Microsoft YaHei"/>
+              </a:rPr>
+              <a:t>递增版本</a:t>
+            </a:r>
+          </a:p>
+        </p:txBody>
+      </p:sp>
+      <p:sp>
+        <p:nvSpPr>
+          <p:cNvPr id="13" name="Rectangle 12"/>
+          <p:cNvSpPr/>
+          <p:nvPr/>
+        </p:nvSpPr>
+        <p:spPr>
+          <a:xfrm>
+            <a:off x="3831336" y="4617720"/>
+            <a:ext cx="1298448" cy="402336"/>
+          </a:xfrm>
+          <a:prstGeom prst="rect">
+            <a:avLst/>
+          </a:prstGeom>
+          <a:noFill/>
+          <a:ln w="12700">
+            <a:solidFill>
+              <a:srgbClr val="465A70"/>
+            </a:solidFill>
+          </a:ln>
+          <a:effectLst/>
+        </p:spPr>
+        <p:style>
+          <a:lnRef idx="1">
+            <a:schemeClr val="accent1"/>
+          </a:lnRef>
+          <a:fillRef idx="3">
+            <a:schemeClr val="accent1"/>
+          </a:fillRef>
+          <a:effectRef idx="2">
+            <a:schemeClr val="accent1"/>
+          </a:effectRef>
+          <a:fontRef idx="minor">
+            <a:schemeClr val="lt1"/>
+          </a:fontRef>
+        </p:style>
+        <p:txBody>
+          <a:bodyPr rtlCol="0" anchor="ctr"/>
+          <a:lstStyle/>
+          <a:p>
+            <a:pPr algn="ctr"/>
+          </a:p>
+        </p:txBody>
+      </p:sp>
+      <p:sp>
+        <p:nvSpPr>
+          <p:cNvPr id="14" name="TextBox 13"/>
+          <p:cNvSpPr txBox="1"/>
+          <p:nvPr/>
+        </p:nvSpPr>
+        <p:spPr>
+          <a:xfrm>
+            <a:off x="3831336" y="4718304"/>
+            <a:ext cx="1298448" cy="274320"/>
+          </a:xfrm>
+          <a:prstGeom prst="rect">
+            <a:avLst/>
+          </a:prstGeom>
+          <a:noFill/>
+        </p:spPr>
+        <p:txBody>
+          <a:bodyPr wrap="square">
+            <a:spAutoFit/>
+          </a:bodyPr>
+          <a:lstStyle/>
+          <a:p>
+            <a:pPr algn="ctr"/>
+            <a:r>
+              <a:rPr sz="1250" b="0">
+                <a:solidFill>
+                  <a:srgbClr val="C9D4E0"/>
+                </a:solidFill>
+                <a:latin typeface="Microsoft YaHei"/>
+              </a:rPr>
+              <a:t>可视对比</a:t>
+            </a:r>
+          </a:p>
+        </p:txBody>
+      </p:sp>
+      <p:sp>
+        <p:nvSpPr>
+          <p:cNvPr id="15" name="TextBox 14"/>
+          <p:cNvSpPr txBox="1"/>
+          <p:nvPr/>
+        </p:nvSpPr>
+        <p:spPr>
+          <a:xfrm>
+            <a:off x="868680" y="5852160"/>
+            <a:ext cx="5669280" cy="365760"/>
+          </a:xfrm>
+          <a:prstGeom prst="rect">
+            <a:avLst/>
+          </a:prstGeom>
+          <a:noFill/>
+        </p:spPr>
+        <p:txBody>
+          <a:bodyPr wrap="square">
+            <a:spAutoFit/>
+          </a:bodyPr>
+          <a:lstStyle/>
+          <a:p>
+            <a:pPr algn="l"/>
+            <a:r>
+              <a:rPr sz="1200" b="0">
+                <a:solidFill>
+                  <a:srgbClr val="768699"/>
+                </a:solidFill>
+                <a:latin typeface="Microsoft YaHei"/>
+              </a:rPr>
+              <a:t>github.com/H-u-iCN/version-diff-delivery</a:t>
             </a:r>
           </a:p>
         </p:txBody>
@@ -3400,8 +3693,8 @@
         </p:nvSpPr>
         <p:spPr>
           <a:xfrm>
-            <a:off x="640080" y="457200"/>
-            <a:ext cx="5486400" cy="457200"/>
+            <a:off x="868680" y="658368"/>
+            <a:ext cx="7315200" cy="365760"/>
           </a:xfrm>
           <a:prstGeom prst="rect">
             <a:avLst/>
@@ -3416,13 +3709,13 @@
           <a:p>
             <a:pPr algn="l"/>
             <a:r>
-              <a:rPr sz="1500" b="1">
+              <a:rPr sz="1300" b="1">
                 <a:solidFill>
                   <a:srgbClr val="9E2A25"/>
                 </a:solidFill>
                 <a:latin typeface="Microsoft YaHei"/>
               </a:rPr>
-              <a:t>目录  CONTENTS</a:t>
+              <a:t>能力  /  CAPABILITIES</a:t>
             </a:r>
           </a:p>
         </p:txBody>
@@ -3435,8 +3728,8 @@
         </p:nvSpPr>
         <p:spPr>
           <a:xfrm>
-            <a:off x="640080" y="914400"/>
-            <a:ext cx="5486400" cy="640080"/>
+            <a:off x="868680" y="1024128"/>
+            <a:ext cx="10058400" cy="777240"/>
           </a:xfrm>
           <a:prstGeom prst="rect">
             <a:avLst/>
@@ -3451,13 +3744,13 @@
           <a:p>
             <a:pPr algn="l"/>
             <a:r>
-              <a:rPr sz="3200" b="1">
+              <a:rPr sz="3400" b="1">
                 <a:solidFill>
                   <a:srgbClr val="1B2A3A"/>
                 </a:solidFill>
                 <a:latin typeface="Microsoft YaHei"/>
               </a:rPr>
-              <a:t>它到底解决什么问题</a:t>
+              <a:t>把「改了什么」变成看得见的产物</a:t>
             </a:r>
           </a:p>
         </p:txBody>
@@ -3470,8 +3763,8 @@
         </p:nvSpPr>
         <p:spPr>
           <a:xfrm>
-            <a:off x="658368" y="1929384"/>
-            <a:ext cx="201168" cy="201168"/>
+            <a:off x="868680" y="1901952"/>
+            <a:ext cx="1371600" cy="41148"/>
           </a:xfrm>
           <a:prstGeom prst="rect">
             <a:avLst/>
@@ -3508,36 +3801,47 @@
       </p:sp>
       <p:sp>
         <p:nvSpPr>
-          <p:cNvPr id="6" name="TextBox 5"/>
-          <p:cNvSpPr txBox="1"/>
-          <p:nvPr/>
-        </p:nvSpPr>
-        <p:spPr>
-          <a:xfrm>
-            <a:off x="1024128" y="1837943"/>
-            <a:ext cx="5120640" cy="411480"/>
-          </a:xfrm>
-          <a:prstGeom prst="rect">
-            <a:avLst/>
-          </a:prstGeom>
-          <a:noFill/>
-        </p:spPr>
-        <p:txBody>
-          <a:bodyPr wrap="square">
-            <a:spAutoFit/>
-          </a:bodyPr>
-          <a:lstStyle/>
-          <a:p>
-            <a:pPr algn="l"/>
-            <a:r>
-              <a:rPr sz="1500" b="0">
-                <a:solidFill>
-                  <a:srgbClr val="3A3A3A"/>
-                </a:solidFill>
-                <a:latin typeface="Microsoft YaHei"/>
-              </a:rPr>
-              <a:t>保留原版，改动另存 _V1 / _V2</a:t>
-            </a:r>
+          <p:cNvPr id="6" name="Rectangle 5"/>
+          <p:cNvSpPr/>
+          <p:nvPr/>
+        </p:nvSpPr>
+        <p:spPr>
+          <a:xfrm>
+            <a:off x="868680" y="2331720"/>
+            <a:ext cx="5001768" cy="1572768"/>
+          </a:xfrm>
+          <a:prstGeom prst="rect">
+            <a:avLst/>
+          </a:prstGeom>
+          <a:solidFill>
+            <a:srgbClr val="FFFFFF"/>
+          </a:solidFill>
+          <a:ln w="12700">
+            <a:solidFill>
+              <a:srgbClr val="E2D9C4"/>
+            </a:solidFill>
+          </a:ln>
+          <a:effectLst/>
+        </p:spPr>
+        <p:style>
+          <a:lnRef idx="1">
+            <a:schemeClr val="accent1"/>
+          </a:lnRef>
+          <a:fillRef idx="3">
+            <a:schemeClr val="accent1"/>
+          </a:fillRef>
+          <a:effectRef idx="2">
+            <a:schemeClr val="accent1"/>
+          </a:effectRef>
+          <a:fontRef idx="minor">
+            <a:schemeClr val="lt1"/>
+          </a:fontRef>
+        </p:style>
+        <p:txBody>
+          <a:bodyPr rtlCol="0" anchor="ctr"/>
+          <a:lstStyle/>
+          <a:p>
+            <a:pPr algn="ctr"/>
           </a:p>
         </p:txBody>
       </p:sp>
@@ -3549,8 +3853,8 @@
         </p:nvSpPr>
         <p:spPr>
           <a:xfrm>
-            <a:off x="658368" y="2587751"/>
-            <a:ext cx="201168" cy="201168"/>
+            <a:off x="868680" y="2331720"/>
+            <a:ext cx="54864" cy="1572768"/>
           </a:xfrm>
           <a:prstGeom prst="rect">
             <a:avLst/>
@@ -3587,14 +3891,58 @@
       </p:sp>
       <p:sp>
         <p:nvSpPr>
-          <p:cNvPr id="8" name="TextBox 7"/>
+          <p:cNvPr id="8" name="Oval 7"/>
+          <p:cNvSpPr/>
+          <p:nvPr/>
+        </p:nvSpPr>
+        <p:spPr>
+          <a:xfrm>
+            <a:off x="1280160" y="2715768"/>
+            <a:ext cx="420624" cy="420624"/>
+          </a:xfrm>
+          <a:prstGeom prst="ellipse">
+            <a:avLst/>
+          </a:prstGeom>
+          <a:solidFill>
+            <a:srgbClr val="1B2A3A"/>
+          </a:solidFill>
+          <a:ln>
+            <a:noFill/>
+          </a:ln>
+          <a:effectLst/>
+        </p:spPr>
+        <p:style>
+          <a:lnRef idx="1">
+            <a:schemeClr val="accent1"/>
+          </a:lnRef>
+          <a:fillRef idx="3">
+            <a:schemeClr val="accent1"/>
+          </a:fillRef>
+          <a:effectRef idx="2">
+            <a:schemeClr val="accent1"/>
+          </a:effectRef>
+          <a:fontRef idx="minor">
+            <a:schemeClr val="lt1"/>
+          </a:fontRef>
+        </p:style>
+        <p:txBody>
+          <a:bodyPr rtlCol="0" anchor="ctr"/>
+          <a:lstStyle/>
+          <a:p>
+            <a:pPr algn="ctr"/>
+          </a:p>
+        </p:txBody>
+      </p:sp>
+      <p:sp>
+        <p:nvSpPr>
+          <p:cNvPr id="9" name="TextBox 8"/>
           <p:cNvSpPr txBox="1"/>
           <p:nvPr/>
         </p:nvSpPr>
         <p:spPr>
           <a:xfrm>
-            <a:off x="1024128" y="2496311"/>
-            <a:ext cx="5120640" cy="411480"/>
+            <a:off x="1280160" y="2816352"/>
+            <a:ext cx="420624" cy="274320"/>
           </a:xfrm>
           <a:prstGeom prst="rect">
             <a:avLst/>
@@ -3607,29 +3955,145 @@
           </a:bodyPr>
           <a:lstStyle/>
           <a:p>
-            <a:pPr algn="l"/>
-            <a:r>
-              <a:rPr sz="1500" b="0">
+            <a:pPr algn="ctr"/>
+            <a:r>
+              <a:rPr sz="1400" b="1">
                 <a:solidFill>
-                  <a:srgbClr val="3A3A3A"/>
+                  <a:srgbClr val="FDF6E6"/>
                 </a:solidFill>
                 <a:latin typeface="Microsoft YaHei"/>
               </a:rPr>
-              <a:t>代码改动 → 左右并排 diff 图</a:t>
-            </a:r>
-          </a:p>
-        </p:txBody>
-      </p:sp>
-      <p:sp>
-        <p:nvSpPr>
-          <p:cNvPr id="9" name="Rectangle 8"/>
+              <a:t>01</a:t>
+            </a:r>
+          </a:p>
+        </p:txBody>
+      </p:sp>
+      <p:sp>
+        <p:nvSpPr>
+          <p:cNvPr id="10" name="TextBox 9"/>
+          <p:cNvSpPr txBox="1"/>
+          <p:nvPr/>
+        </p:nvSpPr>
+        <p:spPr>
+          <a:xfrm>
+            <a:off x="1947672" y="2679191"/>
+            <a:ext cx="3538727" cy="457200"/>
+          </a:xfrm>
+          <a:prstGeom prst="rect">
+            <a:avLst/>
+          </a:prstGeom>
+          <a:noFill/>
+        </p:spPr>
+        <p:txBody>
+          <a:bodyPr wrap="square">
+            <a:spAutoFit/>
+          </a:bodyPr>
+          <a:lstStyle/>
+          <a:p>
+            <a:pPr algn="l"/>
+            <a:r>
+              <a:rPr sz="2100" b="1">
+                <a:solidFill>
+                  <a:srgbClr val="1B2A3A"/>
+                </a:solidFill>
+                <a:latin typeface="Microsoft YaHei"/>
+              </a:rPr>
+              <a:t>原版不动</a:t>
+            </a:r>
+          </a:p>
+        </p:txBody>
+      </p:sp>
+      <p:sp>
+        <p:nvSpPr>
+          <p:cNvPr id="11" name="TextBox 10"/>
+          <p:cNvSpPr txBox="1"/>
+          <p:nvPr/>
+        </p:nvSpPr>
+        <p:spPr>
+          <a:xfrm>
+            <a:off x="1947672" y="3172968"/>
+            <a:ext cx="3538727" cy="548640"/>
+          </a:xfrm>
+          <a:prstGeom prst="rect">
+            <a:avLst/>
+          </a:prstGeom>
+          <a:noFill/>
+        </p:spPr>
+        <p:txBody>
+          <a:bodyPr wrap="square">
+            <a:spAutoFit/>
+          </a:bodyPr>
+          <a:lstStyle/>
+          <a:p>
+            <a:pPr algn="l"/>
+            <a:r>
+              <a:rPr sz="1300" b="0">
+                <a:solidFill>
+                  <a:srgbClr val="7C8692"/>
+                </a:solidFill>
+                <a:latin typeface="Microsoft YaHei"/>
+              </a:rPr>
+              <a:t>V0 永远留在原处，任何时候都能回到起点</a:t>
+            </a:r>
+          </a:p>
+        </p:txBody>
+      </p:sp>
+      <p:sp>
+        <p:nvSpPr>
+          <p:cNvPr id="12" name="Rectangle 11"/>
           <p:cNvSpPr/>
           <p:nvPr/>
         </p:nvSpPr>
         <p:spPr>
           <a:xfrm>
-            <a:off x="658368" y="3246120"/>
-            <a:ext cx="201168" cy="201168"/>
+            <a:off x="6327648" y="2331720"/>
+            <a:ext cx="5001768" cy="1572768"/>
+          </a:xfrm>
+          <a:prstGeom prst="rect">
+            <a:avLst/>
+          </a:prstGeom>
+          <a:solidFill>
+            <a:srgbClr val="FFFFFF"/>
+          </a:solidFill>
+          <a:ln w="12700">
+            <a:solidFill>
+              <a:srgbClr val="E2D9C4"/>
+            </a:solidFill>
+          </a:ln>
+          <a:effectLst/>
+        </p:spPr>
+        <p:style>
+          <a:lnRef idx="1">
+            <a:schemeClr val="accent1"/>
+          </a:lnRef>
+          <a:fillRef idx="3">
+            <a:schemeClr val="accent1"/>
+          </a:fillRef>
+          <a:effectRef idx="2">
+            <a:schemeClr val="accent1"/>
+          </a:effectRef>
+          <a:fontRef idx="minor">
+            <a:schemeClr val="lt1"/>
+          </a:fontRef>
+        </p:style>
+        <p:txBody>
+          <a:bodyPr rtlCol="0" anchor="ctr"/>
+          <a:lstStyle/>
+          <a:p>
+            <a:pPr algn="ctr"/>
+          </a:p>
+        </p:txBody>
+      </p:sp>
+      <p:sp>
+        <p:nvSpPr>
+          <p:cNvPr id="13" name="Rectangle 12"/>
+          <p:cNvSpPr/>
+          <p:nvPr/>
+        </p:nvSpPr>
+        <p:spPr>
+          <a:xfrm>
+            <a:off x="6327648" y="2331720"/>
+            <a:ext cx="54864" cy="1572768"/>
           </a:xfrm>
           <a:prstGeom prst="rect">
             <a:avLst/>
@@ -3666,14 +4130,58 @@
       </p:sp>
       <p:sp>
         <p:nvSpPr>
-          <p:cNvPr id="10" name="TextBox 9"/>
+          <p:cNvPr id="14" name="Oval 13"/>
+          <p:cNvSpPr/>
+          <p:nvPr/>
+        </p:nvSpPr>
+        <p:spPr>
+          <a:xfrm>
+            <a:off x="6739128" y="2715768"/>
+            <a:ext cx="420624" cy="420624"/>
+          </a:xfrm>
+          <a:prstGeom prst="ellipse">
+            <a:avLst/>
+          </a:prstGeom>
+          <a:solidFill>
+            <a:srgbClr val="1B2A3A"/>
+          </a:solidFill>
+          <a:ln>
+            <a:noFill/>
+          </a:ln>
+          <a:effectLst/>
+        </p:spPr>
+        <p:style>
+          <a:lnRef idx="1">
+            <a:schemeClr val="accent1"/>
+          </a:lnRef>
+          <a:fillRef idx="3">
+            <a:schemeClr val="accent1"/>
+          </a:fillRef>
+          <a:effectRef idx="2">
+            <a:schemeClr val="accent1"/>
+          </a:effectRef>
+          <a:fontRef idx="minor">
+            <a:schemeClr val="lt1"/>
+          </a:fontRef>
+        </p:style>
+        <p:txBody>
+          <a:bodyPr rtlCol="0" anchor="ctr"/>
+          <a:lstStyle/>
+          <a:p>
+            <a:pPr algn="ctr"/>
+          </a:p>
+        </p:txBody>
+      </p:sp>
+      <p:sp>
+        <p:nvSpPr>
+          <p:cNvPr id="15" name="TextBox 14"/>
           <p:cNvSpPr txBox="1"/>
           <p:nvPr/>
         </p:nvSpPr>
         <p:spPr>
           <a:xfrm>
-            <a:off x="1024128" y="3154679"/>
-            <a:ext cx="5120640" cy="411480"/>
+            <a:off x="6739128" y="2816352"/>
+            <a:ext cx="420624" cy="274320"/>
           </a:xfrm>
           <a:prstGeom prst="rect">
             <a:avLst/>
@@ -3686,29 +4194,145 @@
           </a:bodyPr>
           <a:lstStyle/>
           <a:p>
-            <a:pPr algn="l"/>
-            <a:r>
-              <a:rPr sz="1500" b="0">
+            <a:pPr algn="ctr"/>
+            <a:r>
+              <a:rPr sz="1400" b="1">
                 <a:solidFill>
-                  <a:srgbClr val="3A3A3A"/>
+                  <a:srgbClr val="FDF6E6"/>
                 </a:solidFill>
                 <a:latin typeface="Microsoft YaHei"/>
               </a:rPr>
-              <a:t>图片改动 → 并排图 + 变更区域框</a:t>
-            </a:r>
-          </a:p>
-        </p:txBody>
-      </p:sp>
-      <p:sp>
-        <p:nvSpPr>
-          <p:cNvPr id="11" name="Rectangle 10"/>
+              <a:t>02</a:t>
+            </a:r>
+          </a:p>
+        </p:txBody>
+      </p:sp>
+      <p:sp>
+        <p:nvSpPr>
+          <p:cNvPr id="16" name="TextBox 15"/>
+          <p:cNvSpPr txBox="1"/>
+          <p:nvPr/>
+        </p:nvSpPr>
+        <p:spPr>
+          <a:xfrm>
+            <a:off x="7406640" y="2679191"/>
+            <a:ext cx="3538727" cy="457200"/>
+          </a:xfrm>
+          <a:prstGeom prst="rect">
+            <a:avLst/>
+          </a:prstGeom>
+          <a:noFill/>
+        </p:spPr>
+        <p:txBody>
+          <a:bodyPr wrap="square">
+            <a:spAutoFit/>
+          </a:bodyPr>
+          <a:lstStyle/>
+          <a:p>
+            <a:pPr algn="l"/>
+            <a:r>
+              <a:rPr sz="2100" b="1">
+                <a:solidFill>
+                  <a:srgbClr val="1B2A3A"/>
+                </a:solidFill>
+                <a:latin typeface="Microsoft YaHei"/>
+              </a:rPr>
+              <a:t>递增版本</a:t>
+            </a:r>
+          </a:p>
+        </p:txBody>
+      </p:sp>
+      <p:sp>
+        <p:nvSpPr>
+          <p:cNvPr id="17" name="TextBox 16"/>
+          <p:cNvSpPr txBox="1"/>
+          <p:nvPr/>
+        </p:nvSpPr>
+        <p:spPr>
+          <a:xfrm>
+            <a:off x="7406640" y="3172968"/>
+            <a:ext cx="3538727" cy="548640"/>
+          </a:xfrm>
+          <a:prstGeom prst="rect">
+            <a:avLst/>
+          </a:prstGeom>
+          <a:noFill/>
+        </p:spPr>
+        <p:txBody>
+          <a:bodyPr wrap="square">
+            <a:spAutoFit/>
+          </a:bodyPr>
+          <a:lstStyle/>
+          <a:p>
+            <a:pPr algn="l"/>
+            <a:r>
+              <a:rPr sz="1300" b="0">
+                <a:solidFill>
+                  <a:srgbClr val="7C8692"/>
+                </a:solidFill>
+                <a:latin typeface="Microsoft YaHei"/>
+              </a:rPr>
+              <a:t>改动落在 _V1 / _V2，重名自动跳号</a:t>
+            </a:r>
+          </a:p>
+        </p:txBody>
+      </p:sp>
+      <p:sp>
+        <p:nvSpPr>
+          <p:cNvPr id="18" name="Rectangle 17"/>
           <p:cNvSpPr/>
           <p:nvPr/>
         </p:nvSpPr>
         <p:spPr>
           <a:xfrm>
-            <a:off x="658368" y="3904487"/>
-            <a:ext cx="201168" cy="201168"/>
+            <a:off x="868680" y="4288536"/>
+            <a:ext cx="5001768" cy="1572768"/>
+          </a:xfrm>
+          <a:prstGeom prst="rect">
+            <a:avLst/>
+          </a:prstGeom>
+          <a:solidFill>
+            <a:srgbClr val="FFFFFF"/>
+          </a:solidFill>
+          <a:ln w="12700">
+            <a:solidFill>
+              <a:srgbClr val="E2D9C4"/>
+            </a:solidFill>
+          </a:ln>
+          <a:effectLst/>
+        </p:spPr>
+        <p:style>
+          <a:lnRef idx="1">
+            <a:schemeClr val="accent1"/>
+          </a:lnRef>
+          <a:fillRef idx="3">
+            <a:schemeClr val="accent1"/>
+          </a:fillRef>
+          <a:effectRef idx="2">
+            <a:schemeClr val="accent1"/>
+          </a:effectRef>
+          <a:fontRef idx="minor">
+            <a:schemeClr val="lt1"/>
+          </a:fontRef>
+        </p:style>
+        <p:txBody>
+          <a:bodyPr rtlCol="0" anchor="ctr"/>
+          <a:lstStyle/>
+          <a:p>
+            <a:pPr algn="ctr"/>
+          </a:p>
+        </p:txBody>
+      </p:sp>
+      <p:sp>
+        <p:nvSpPr>
+          <p:cNvPr id="19" name="Rectangle 18"/>
+          <p:cNvSpPr/>
+          <p:nvPr/>
+        </p:nvSpPr>
+        <p:spPr>
+          <a:xfrm>
+            <a:off x="868680" y="4288536"/>
+            <a:ext cx="54864" cy="1572768"/>
           </a:xfrm>
           <a:prstGeom prst="rect">
             <a:avLst/>
@@ -3745,14 +4369,58 @@
       </p:sp>
       <p:sp>
         <p:nvSpPr>
-          <p:cNvPr id="12" name="TextBox 11"/>
+          <p:cNvPr id="20" name="Oval 19"/>
+          <p:cNvSpPr/>
+          <p:nvPr/>
+        </p:nvSpPr>
+        <p:spPr>
+          <a:xfrm>
+            <a:off x="1280160" y="4672583"/>
+            <a:ext cx="420624" cy="420624"/>
+          </a:xfrm>
+          <a:prstGeom prst="ellipse">
+            <a:avLst/>
+          </a:prstGeom>
+          <a:solidFill>
+            <a:srgbClr val="1B2A3A"/>
+          </a:solidFill>
+          <a:ln>
+            <a:noFill/>
+          </a:ln>
+          <a:effectLst/>
+        </p:spPr>
+        <p:style>
+          <a:lnRef idx="1">
+            <a:schemeClr val="accent1"/>
+          </a:lnRef>
+          <a:fillRef idx="3">
+            <a:schemeClr val="accent1"/>
+          </a:fillRef>
+          <a:effectRef idx="2">
+            <a:schemeClr val="accent1"/>
+          </a:effectRef>
+          <a:fontRef idx="minor">
+            <a:schemeClr val="lt1"/>
+          </a:fontRef>
+        </p:style>
+        <p:txBody>
+          <a:bodyPr rtlCol="0" anchor="ctr"/>
+          <a:lstStyle/>
+          <a:p>
+            <a:pPr algn="ctr"/>
+          </a:p>
+        </p:txBody>
+      </p:sp>
+      <p:sp>
+        <p:nvSpPr>
+          <p:cNvPr id="21" name="TextBox 20"/>
           <p:cNvSpPr txBox="1"/>
           <p:nvPr/>
         </p:nvSpPr>
         <p:spPr>
           <a:xfrm>
-            <a:off x="1024128" y="3813048"/>
-            <a:ext cx="5120640" cy="411480"/>
+            <a:off x="1280160" y="4773168"/>
+            <a:ext cx="420624" cy="274320"/>
           </a:xfrm>
           <a:prstGeom prst="rect">
             <a:avLst/>
@@ -3765,386 +4433,328 @@
           </a:bodyPr>
           <a:lstStyle/>
           <a:p>
-            <a:pPr algn="l"/>
-            <a:r>
-              <a:rPr sz="1500" b="0">
+            <a:pPr algn="ctr"/>
+            <a:r>
+              <a:rPr sz="1400" b="1">
                 <a:solidFill>
-                  <a:srgbClr val="3A3A3A"/>
+                  <a:srgbClr val="FDF6E6"/>
                 </a:solidFill>
                 <a:latin typeface="Microsoft YaHei"/>
               </a:rPr>
-              <a:t>PPT / Word → 整份拼成一张接触印相表</a:t>
-            </a:r>
-          </a:p>
-        </p:txBody>
-      </p:sp>
-      <p:graphicFrame>
-        <p:nvGraphicFramePr>
-          <p:cNvPr id="13" name="Table 12"/>
-          <p:cNvGraphicFramePr>
-            <a:graphicFrameLocks noGrp="1"/>
-          </p:cNvGraphicFramePr>
-          <p:nvPr/>
-        </p:nvGraphicFramePr>
-        <p:xfrm>
-          <a:off x="6492240" y="1005840"/>
-          <a:ext cx="5029200" cy="2834640"/>
-        </p:xfrm>
-        <a:graphic>
-          <a:graphicData uri="http://schemas.openxmlformats.org/drawingml/2006/table">
-            <a:tbl>
-              <a:tblPr firstRow="1" bandRow="1">
-                <a:tableStyleId>{5C22544A-7EE6-4342-B048-85BDC9FD1C3A}</a:tableStyleId>
-              </a:tblPr>
-              <a:tblGrid>
-                <a:gridCol w="1676400"/>
-                <a:gridCol w="1676400"/>
-                <a:gridCol w="1676400"/>
-              </a:tblGrid>
-              <a:tr h="566928">
-                <a:tc>
-                  <a:txBody>
-                    <a:bodyPr/>
-                    <a:lstStyle/>
-                    <a:p>
-                      <a:r>
-                        <a:rPr sz="1200" b="1">
-                          <a:solidFill>
-                            <a:srgbClr val="FFFFFF"/>
-                          </a:solidFill>
-                          <a:latin typeface="Microsoft YaHei"/>
-                        </a:rPr>
-                        <a:t>版本</a:t>
-                      </a:r>
-                    </a:p>
-                  </a:txBody>
-                  <a:tcPr>
-                    <a:solidFill>
-                      <a:srgbClr val="1B2A3A"/>
-                    </a:solidFill>
-                  </a:tcPr>
-                </a:tc>
-                <a:tc>
-                  <a:txBody>
-                    <a:bodyPr/>
-                    <a:lstStyle/>
-                    <a:p>
-                      <a:r>
-                        <a:rPr sz="1200" b="1">
-                          <a:solidFill>
-                            <a:srgbClr val="FFFFFF"/>
-                          </a:solidFill>
-                          <a:latin typeface="Microsoft YaHei"/>
-                        </a:rPr>
-                        <a:t>改动内容</a:t>
-                      </a:r>
-                    </a:p>
-                  </a:txBody>
-                  <a:tcPr>
-                    <a:solidFill>
-                      <a:srgbClr val="1B2A3A"/>
-                    </a:solidFill>
-                  </a:tcPr>
-                </a:tc>
-                <a:tc>
-                  <a:txBody>
-                    <a:bodyPr/>
-                    <a:lstStyle/>
-                    <a:p>
-                      <a:r>
-                        <a:rPr sz="1200" b="1">
-                          <a:solidFill>
-                            <a:srgbClr val="FFFFFF"/>
-                          </a:solidFill>
-                          <a:latin typeface="Microsoft YaHei"/>
-                        </a:rPr>
-                        <a:t>交付形态</a:t>
-                      </a:r>
-                    </a:p>
-                  </a:txBody>
-                  <a:tcPr>
-                    <a:solidFill>
-                      <a:srgbClr val="1B2A3A"/>
-                    </a:solidFill>
-                  </a:tcPr>
-                </a:tc>
-              </a:tr>
-              <a:tr h="566928">
-                <a:tc>
-                  <a:txBody>
-                    <a:bodyPr/>
-                    <a:lstStyle/>
-                    <a:p>
-                      <a:r>
-                        <a:rPr sz="1200" b="0">
-                          <a:solidFill>
-                            <a:srgbClr val="3A3A3A"/>
-                          </a:solidFill>
-                          <a:latin typeface="Microsoft YaHei"/>
-                        </a:rPr>
-                        <a:t>V0</a:t>
-                      </a:r>
-                    </a:p>
-                  </a:txBody>
-                  <a:tcPr>
-                    <a:solidFill>
-                      <a:srgbClr val="FFFFFF"/>
-                    </a:solidFill>
-                  </a:tcPr>
-                </a:tc>
-                <a:tc>
-                  <a:txBody>
-                    <a:bodyPr/>
-                    <a:lstStyle/>
-                    <a:p>
-                      <a:r>
-                        <a:rPr sz="1200" b="0">
-                          <a:solidFill>
-                            <a:srgbClr val="3A3A3A"/>
-                          </a:solidFill>
-                          <a:latin typeface="Microsoft YaHei"/>
-                        </a:rPr>
-                        <a:t>原始文件</a:t>
-                      </a:r>
-                    </a:p>
-                  </a:txBody>
-                  <a:tcPr>
-                    <a:solidFill>
-                      <a:srgbClr val="FFFFFF"/>
-                    </a:solidFill>
-                  </a:tcPr>
-                </a:tc>
-                <a:tc>
-                  <a:txBody>
-                    <a:bodyPr/>
-                    <a:lstStyle/>
-                    <a:p>
-                      <a:r>
-                        <a:rPr sz="1200" b="0">
-                          <a:solidFill>
-                            <a:srgbClr val="3A3A3A"/>
-                          </a:solidFill>
-                          <a:latin typeface="Microsoft YaHei"/>
-                        </a:rPr>
-                        <a:t>不覆盖</a:t>
-                      </a:r>
-                    </a:p>
-                  </a:txBody>
-                  <a:tcPr>
-                    <a:solidFill>
-                      <a:srgbClr val="FFFFFF"/>
-                    </a:solidFill>
-                  </a:tcPr>
-                </a:tc>
-              </a:tr>
-              <a:tr h="566928">
-                <a:tc>
-                  <a:txBody>
-                    <a:bodyPr/>
-                    <a:lstStyle/>
-                    <a:p>
-                      <a:r>
-                        <a:rPr sz="1200" b="0">
-                          <a:solidFill>
-                            <a:srgbClr val="3A3A3A"/>
-                          </a:solidFill>
-                          <a:latin typeface="Microsoft YaHei"/>
-                        </a:rPr>
-                        <a:t>V1</a:t>
-                      </a:r>
-                    </a:p>
-                  </a:txBody>
-                  <a:tcPr>
-                    <a:solidFill>
-                      <a:srgbClr val="F2ECDD"/>
-                    </a:solidFill>
-                  </a:tcPr>
-                </a:tc>
-                <a:tc>
-                  <a:txBody>
-                    <a:bodyPr/>
-                    <a:lstStyle/>
-                    <a:p>
-                      <a:r>
-                        <a:rPr sz="1200" b="0">
-                          <a:solidFill>
-                            <a:srgbClr val="3A3A3A"/>
-                          </a:solidFill>
-                          <a:latin typeface="Microsoft YaHei"/>
-                        </a:rPr>
-                        <a:t>标题文案</a:t>
-                      </a:r>
-                    </a:p>
-                  </a:txBody>
-                  <a:tcPr>
-                    <a:solidFill>
-                      <a:srgbClr val="F2ECDD"/>
-                    </a:solidFill>
-                  </a:tcPr>
-                </a:tc>
-                <a:tc>
-                  <a:txBody>
-                    <a:bodyPr/>
-                    <a:lstStyle/>
-                    <a:p>
-                      <a:r>
-                        <a:rPr sz="1200" b="0">
-                          <a:solidFill>
-                            <a:srgbClr val="3A3A3A"/>
-                          </a:solidFill>
-                          <a:latin typeface="Microsoft YaHei"/>
-                        </a:rPr>
-                        <a:t>并排 diff 图</a:t>
-                      </a:r>
-                    </a:p>
-                  </a:txBody>
-                  <a:tcPr>
-                    <a:solidFill>
-                      <a:srgbClr val="F2ECDD"/>
-                    </a:solidFill>
-                  </a:tcPr>
-                </a:tc>
-              </a:tr>
-              <a:tr h="566928">
-                <a:tc>
-                  <a:txBody>
-                    <a:bodyPr/>
-                    <a:lstStyle/>
-                    <a:p>
-                      <a:r>
-                        <a:rPr sz="1200" b="0">
-                          <a:solidFill>
-                            <a:srgbClr val="3A3A3A"/>
-                          </a:solidFill>
-                          <a:latin typeface="Microsoft YaHei"/>
-                        </a:rPr>
-                        <a:t>V2</a:t>
-                      </a:r>
-                    </a:p>
-                  </a:txBody>
-                  <a:tcPr>
-                    <a:solidFill>
-                      <a:srgbClr val="FFFFFF"/>
-                    </a:solidFill>
-                  </a:tcPr>
-                </a:tc>
-                <a:tc>
-                  <a:txBody>
-                    <a:bodyPr/>
-                    <a:lstStyle/>
-                    <a:p>
-                      <a:r>
-                        <a:rPr sz="1200" b="0">
-                          <a:solidFill>
-                            <a:srgbClr val="3A3A3A"/>
-                          </a:solidFill>
-                          <a:latin typeface="Microsoft YaHei"/>
-                        </a:rPr>
-                        <a:t>新增常量</a:t>
-                      </a:r>
-                    </a:p>
-                  </a:txBody>
-                  <a:tcPr>
-                    <a:solidFill>
-                      <a:srgbClr val="FFFFFF"/>
-                    </a:solidFill>
-                  </a:tcPr>
-                </a:tc>
-                <a:tc>
-                  <a:txBody>
-                    <a:bodyPr/>
-                    <a:lstStyle/>
-                    <a:p>
-                      <a:r>
-                        <a:rPr sz="1200" b="0">
-                          <a:solidFill>
-                            <a:srgbClr val="3A3A3A"/>
-                          </a:solidFill>
-                          <a:latin typeface="Microsoft YaHei"/>
-                        </a:rPr>
-                        <a:t>并排 diff 图</a:t>
-                      </a:r>
-                    </a:p>
-                  </a:txBody>
-                  <a:tcPr>
-                    <a:solidFill>
-                      <a:srgbClr val="FFFFFF"/>
-                    </a:solidFill>
-                  </a:tcPr>
-                </a:tc>
-              </a:tr>
-              <a:tr h="566928">
-                <a:tc>
-                  <a:txBody>
-                    <a:bodyPr/>
-                    <a:lstStyle/>
-                    <a:p>
-                      <a:r>
-                        <a:rPr sz="1200" b="0">
-                          <a:solidFill>
-                            <a:srgbClr val="3A3A3A"/>
-                          </a:solidFill>
-                          <a:latin typeface="Microsoft YaHei"/>
-                        </a:rPr>
-                        <a:t>V3</a:t>
-                      </a:r>
-                    </a:p>
-                  </a:txBody>
-                  <a:tcPr>
-                    <a:solidFill>
-                      <a:srgbClr val="F2ECDD"/>
-                    </a:solidFill>
-                  </a:tcPr>
-                </a:tc>
-                <a:tc>
-                  <a:txBody>
-                    <a:bodyPr/>
-                    <a:lstStyle/>
-                    <a:p>
-                      <a:r>
-                        <a:rPr sz="1200" b="0">
-                          <a:solidFill>
-                            <a:srgbClr val="3A3A3A"/>
-                          </a:solidFill>
-                          <a:latin typeface="Microsoft YaHei"/>
-                        </a:rPr>
-                        <a:t>图片换色</a:t>
-                      </a:r>
-                    </a:p>
-                  </a:txBody>
-                  <a:tcPr>
-                    <a:solidFill>
-                      <a:srgbClr val="F2ECDD"/>
-                    </a:solidFill>
-                  </a:tcPr>
-                </a:tc>
-                <a:tc>
-                  <a:txBody>
-                    <a:bodyPr/>
-                    <a:lstStyle/>
-                    <a:p>
-                      <a:r>
-                        <a:rPr sz="1200" b="0">
-                          <a:solidFill>
-                            <a:srgbClr val="3A3A3A"/>
-                          </a:solidFill>
-                          <a:latin typeface="Microsoft YaHei"/>
-                        </a:rPr>
-                        <a:t>橙框标注图</a:t>
-                      </a:r>
-                    </a:p>
-                  </a:txBody>
-                  <a:tcPr>
-                    <a:solidFill>
-                      <a:srgbClr val="F2ECDD"/>
-                    </a:solidFill>
-                  </a:tcPr>
-                </a:tc>
-              </a:tr>
-            </a:tbl>
-          </a:graphicData>
-        </a:graphic>
-      </p:graphicFrame>
+              <a:t>03</a:t>
+            </a:r>
+          </a:p>
+        </p:txBody>
+      </p:sp>
+      <p:sp>
+        <p:nvSpPr>
+          <p:cNvPr id="22" name="TextBox 21"/>
+          <p:cNvSpPr txBox="1"/>
+          <p:nvPr/>
+        </p:nvSpPr>
+        <p:spPr>
+          <a:xfrm>
+            <a:off x="1947672" y="4636007"/>
+            <a:ext cx="3538727" cy="457200"/>
+          </a:xfrm>
+          <a:prstGeom prst="rect">
+            <a:avLst/>
+          </a:prstGeom>
+          <a:noFill/>
+        </p:spPr>
+        <p:txBody>
+          <a:bodyPr wrap="square">
+            <a:spAutoFit/>
+          </a:bodyPr>
+          <a:lstStyle/>
+          <a:p>
+            <a:pPr algn="l"/>
+            <a:r>
+              <a:rPr sz="2100" b="1">
+                <a:solidFill>
+                  <a:srgbClr val="1B2A3A"/>
+                </a:solidFill>
+                <a:latin typeface="Microsoft YaHei"/>
+              </a:rPr>
+              <a:t>对比图</a:t>
+            </a:r>
+          </a:p>
+        </p:txBody>
+      </p:sp>
+      <p:sp>
+        <p:nvSpPr>
+          <p:cNvPr id="23" name="TextBox 22"/>
+          <p:cNvSpPr txBox="1"/>
+          <p:nvPr/>
+        </p:nvSpPr>
+        <p:spPr>
+          <a:xfrm>
+            <a:off x="1947672" y="5129783"/>
+            <a:ext cx="3538727" cy="548640"/>
+          </a:xfrm>
+          <a:prstGeom prst="rect">
+            <a:avLst/>
+          </a:prstGeom>
+          <a:noFill/>
+        </p:spPr>
+        <p:txBody>
+          <a:bodyPr wrap="square">
+            <a:spAutoFit/>
+          </a:bodyPr>
+          <a:lstStyle/>
+          <a:p>
+            <a:pPr algn="l"/>
+            <a:r>
+              <a:rPr sz="1300" b="0">
+                <a:solidFill>
+                  <a:srgbClr val="7C8692"/>
+                </a:solidFill>
+                <a:latin typeface="Microsoft YaHei"/>
+              </a:rPr>
+              <a:t>代码 / 图片 / PPT / Word 各有对应的可视形式</a:t>
+            </a:r>
+          </a:p>
+        </p:txBody>
+      </p:sp>
+      <p:sp>
+        <p:nvSpPr>
+          <p:cNvPr id="24" name="Rectangle 23"/>
+          <p:cNvSpPr/>
+          <p:nvPr/>
+        </p:nvSpPr>
+        <p:spPr>
+          <a:xfrm>
+            <a:off x="6327648" y="4288536"/>
+            <a:ext cx="5001768" cy="1572768"/>
+          </a:xfrm>
+          <a:prstGeom prst="rect">
+            <a:avLst/>
+          </a:prstGeom>
+          <a:solidFill>
+            <a:srgbClr val="FFFFFF"/>
+          </a:solidFill>
+          <a:ln w="12700">
+            <a:solidFill>
+              <a:srgbClr val="E2D9C4"/>
+            </a:solidFill>
+          </a:ln>
+          <a:effectLst/>
+        </p:spPr>
+        <p:style>
+          <a:lnRef idx="1">
+            <a:schemeClr val="accent1"/>
+          </a:lnRef>
+          <a:fillRef idx="3">
+            <a:schemeClr val="accent1"/>
+          </a:fillRef>
+          <a:effectRef idx="2">
+            <a:schemeClr val="accent1"/>
+          </a:effectRef>
+          <a:fontRef idx="minor">
+            <a:schemeClr val="lt1"/>
+          </a:fontRef>
+        </p:style>
+        <p:txBody>
+          <a:bodyPr rtlCol="0" anchor="ctr"/>
+          <a:lstStyle/>
+          <a:p>
+            <a:pPr algn="ctr"/>
+          </a:p>
+        </p:txBody>
+      </p:sp>
+      <p:sp>
+        <p:nvSpPr>
+          <p:cNvPr id="25" name="Rectangle 24"/>
+          <p:cNvSpPr/>
+          <p:nvPr/>
+        </p:nvSpPr>
+        <p:spPr>
+          <a:xfrm>
+            <a:off x="6327648" y="4288536"/>
+            <a:ext cx="54864" cy="1572768"/>
+          </a:xfrm>
+          <a:prstGeom prst="rect">
+            <a:avLst/>
+          </a:prstGeom>
+          <a:solidFill>
+            <a:srgbClr val="9E2A25"/>
+          </a:solidFill>
+          <a:ln>
+            <a:noFill/>
+          </a:ln>
+          <a:effectLst/>
+        </p:spPr>
+        <p:style>
+          <a:lnRef idx="1">
+            <a:schemeClr val="accent1"/>
+          </a:lnRef>
+          <a:fillRef idx="3">
+            <a:schemeClr val="accent1"/>
+          </a:fillRef>
+          <a:effectRef idx="2">
+            <a:schemeClr val="accent1"/>
+          </a:effectRef>
+          <a:fontRef idx="minor">
+            <a:schemeClr val="lt1"/>
+          </a:fontRef>
+        </p:style>
+        <p:txBody>
+          <a:bodyPr rtlCol="0" anchor="ctr"/>
+          <a:lstStyle/>
+          <a:p>
+            <a:pPr algn="ctr"/>
+          </a:p>
+        </p:txBody>
+      </p:sp>
+      <p:sp>
+        <p:nvSpPr>
+          <p:cNvPr id="26" name="Oval 25"/>
+          <p:cNvSpPr/>
+          <p:nvPr/>
+        </p:nvSpPr>
+        <p:spPr>
+          <a:xfrm>
+            <a:off x="6739128" y="4672583"/>
+            <a:ext cx="420624" cy="420624"/>
+          </a:xfrm>
+          <a:prstGeom prst="ellipse">
+            <a:avLst/>
+          </a:prstGeom>
+          <a:solidFill>
+            <a:srgbClr val="1B2A3A"/>
+          </a:solidFill>
+          <a:ln>
+            <a:noFill/>
+          </a:ln>
+          <a:effectLst/>
+        </p:spPr>
+        <p:style>
+          <a:lnRef idx="1">
+            <a:schemeClr val="accent1"/>
+          </a:lnRef>
+          <a:fillRef idx="3">
+            <a:schemeClr val="accent1"/>
+          </a:fillRef>
+          <a:effectRef idx="2">
+            <a:schemeClr val="accent1"/>
+          </a:effectRef>
+          <a:fontRef idx="minor">
+            <a:schemeClr val="lt1"/>
+          </a:fontRef>
+        </p:style>
+        <p:txBody>
+          <a:bodyPr rtlCol="0" anchor="ctr"/>
+          <a:lstStyle/>
+          <a:p>
+            <a:pPr algn="ctr"/>
+          </a:p>
+        </p:txBody>
+      </p:sp>
+      <p:sp>
+        <p:nvSpPr>
+          <p:cNvPr id="27" name="TextBox 26"/>
+          <p:cNvSpPr txBox="1"/>
+          <p:nvPr/>
+        </p:nvSpPr>
+        <p:spPr>
+          <a:xfrm>
+            <a:off x="6739128" y="4773168"/>
+            <a:ext cx="420624" cy="274320"/>
+          </a:xfrm>
+          <a:prstGeom prst="rect">
+            <a:avLst/>
+          </a:prstGeom>
+          <a:noFill/>
+        </p:spPr>
+        <p:txBody>
+          <a:bodyPr wrap="square">
+            <a:spAutoFit/>
+          </a:bodyPr>
+          <a:lstStyle/>
+          <a:p>
+            <a:pPr algn="ctr"/>
+            <a:r>
+              <a:rPr sz="1400" b="1">
+                <a:solidFill>
+                  <a:srgbClr val="FDF6E6"/>
+                </a:solidFill>
+                <a:latin typeface="Microsoft YaHei"/>
+              </a:rPr>
+              <a:t>04</a:t>
+            </a:r>
+          </a:p>
+        </p:txBody>
+      </p:sp>
+      <p:sp>
+        <p:nvSpPr>
+          <p:cNvPr id="28" name="TextBox 27"/>
+          <p:cNvSpPr txBox="1"/>
+          <p:nvPr/>
+        </p:nvSpPr>
+        <p:spPr>
+          <a:xfrm>
+            <a:off x="7406640" y="4636007"/>
+            <a:ext cx="3538727" cy="457200"/>
+          </a:xfrm>
+          <a:prstGeom prst="rect">
+            <a:avLst/>
+          </a:prstGeom>
+          <a:noFill/>
+        </p:spPr>
+        <p:txBody>
+          <a:bodyPr wrap="square">
+            <a:spAutoFit/>
+          </a:bodyPr>
+          <a:lstStyle/>
+          <a:p>
+            <a:pPr algn="l"/>
+            <a:r>
+              <a:rPr sz="2100" b="1">
+                <a:solidFill>
+                  <a:srgbClr val="1B2A3A"/>
+                </a:solidFill>
+                <a:latin typeface="Microsoft YaHei"/>
+              </a:rPr>
+              <a:t>一行安装</a:t>
+            </a:r>
+          </a:p>
+        </p:txBody>
+      </p:sp>
+      <p:sp>
+        <p:nvSpPr>
+          <p:cNvPr id="29" name="TextBox 28"/>
+          <p:cNvSpPr txBox="1"/>
+          <p:nvPr/>
+        </p:nvSpPr>
+        <p:spPr>
+          <a:xfrm>
+            <a:off x="7406640" y="5129783"/>
+            <a:ext cx="3538727" cy="548640"/>
+          </a:xfrm>
+          <a:prstGeom prst="rect">
+            <a:avLst/>
+          </a:prstGeom>
+          <a:noFill/>
+        </p:spPr>
+        <p:txBody>
+          <a:bodyPr wrap="square">
+            <a:spAutoFit/>
+          </a:bodyPr>
+          <a:lstStyle/>
+          <a:p>
+            <a:pPr algn="l"/>
+            <a:r>
+              <a:rPr sz="1300" b="0">
+                <a:solidFill>
+                  <a:srgbClr val="7C8692"/>
+                </a:solidFill>
+                <a:latin typeface="Microsoft YaHei"/>
+              </a:rPr>
+              <a:t>git clone 进 skills 目录，下个会话即生效</a:t>
+            </a:r>
+          </a:p>
+        </p:txBody>
+      </p:sp>
     </p:spTree>
   </p:cSld>
   <p:clrMapOvr>
@@ -4215,8 +4825,8 @@
         </p:nvSpPr>
         <p:spPr>
           <a:xfrm>
-            <a:off x="640080" y="457200"/>
-            <a:ext cx="5486400" cy="457200"/>
+            <a:off x="868680" y="658368"/>
+            <a:ext cx="7315200" cy="365760"/>
           </a:xfrm>
           <a:prstGeom prst="rect">
             <a:avLst/>
@@ -4231,13 +4841,13 @@
           <a:p>
             <a:pPr algn="l"/>
             <a:r>
-              <a:rPr sz="1500" b="1">
+              <a:rPr sz="1300" b="1">
                 <a:solidFill>
                   <a:srgbClr val="9E2A25"/>
                 </a:solidFill>
                 <a:latin typeface="Microsoft YaHei"/>
               </a:rPr>
-              <a:t>演进  ROADMAP</a:t>
+              <a:t>流程  /  WORKFLOW</a:t>
             </a:r>
           </a:p>
         </p:txBody>
@@ -4250,8 +4860,8 @@
         </p:nvSpPr>
         <p:spPr>
           <a:xfrm>
-            <a:off x="640080" y="914400"/>
-            <a:ext cx="8229600" cy="640080"/>
+            <a:off x="868680" y="1024128"/>
+            <a:ext cx="10058400" cy="777240"/>
           </a:xfrm>
           <a:prstGeom prst="rect">
             <a:avLst/>
@@ -4266,13 +4876,13 @@
           <a:p>
             <a:pPr algn="l"/>
             <a:r>
-              <a:rPr sz="3200" b="1">
+              <a:rPr sz="3400" b="1">
                 <a:solidFill>
                   <a:srgbClr val="1B2A3A"/>
                 </a:solidFill>
                 <a:latin typeface="Microsoft YaHei"/>
               </a:rPr>
-              <a:t>每轮迭代都留痕，都可回看</a:t>
+              <a:t>一轮迭代，三个动作</a:t>
             </a:r>
           </a:p>
         </p:txBody>
@@ -4285,8 +4895,8 @@
         </p:nvSpPr>
         <p:spPr>
           <a:xfrm>
-            <a:off x="822960" y="3063240"/>
-            <a:ext cx="10424160" cy="54864"/>
+            <a:off x="868680" y="1901952"/>
+            <a:ext cx="1371600" cy="41148"/>
           </a:xfrm>
           <a:prstGeom prst="rect">
             <a:avLst/>
@@ -4323,16 +4933,572 @@
       </p:sp>
       <p:sp>
         <p:nvSpPr>
-          <p:cNvPr id="6" name="Oval 5"/>
+          <p:cNvPr id="6" name="Rectangle 5"/>
           <p:cNvSpPr/>
           <p:nvPr/>
         </p:nvSpPr>
         <p:spPr>
           <a:xfrm>
-            <a:off x="1051560" y="2871216"/>
-            <a:ext cx="384048" cy="384048"/>
-          </a:xfrm>
-          <a:prstGeom prst="ellipse">
+            <a:off x="868680" y="2468880"/>
+            <a:ext cx="3063240" cy="2240280"/>
+          </a:xfrm>
+          <a:prstGeom prst="rect">
+            <a:avLst/>
+          </a:prstGeom>
+          <a:solidFill>
+            <a:srgbClr val="FFFFFF"/>
+          </a:solidFill>
+          <a:ln w="12700">
+            <a:solidFill>
+              <a:srgbClr val="E2D9C4"/>
+            </a:solidFill>
+          </a:ln>
+          <a:effectLst/>
+        </p:spPr>
+        <p:style>
+          <a:lnRef idx="1">
+            <a:schemeClr val="accent1"/>
+          </a:lnRef>
+          <a:fillRef idx="3">
+            <a:schemeClr val="accent1"/>
+          </a:fillRef>
+          <a:effectRef idx="2">
+            <a:schemeClr val="accent1"/>
+          </a:effectRef>
+          <a:fontRef idx="minor">
+            <a:schemeClr val="lt1"/>
+          </a:fontRef>
+        </p:style>
+        <p:txBody>
+          <a:bodyPr rtlCol="0" anchor="ctr"/>
+          <a:lstStyle/>
+          <a:p>
+            <a:pPr algn="ctr"/>
+          </a:p>
+        </p:txBody>
+      </p:sp>
+      <p:sp>
+        <p:nvSpPr>
+          <p:cNvPr id="7" name="TextBox 6"/>
+          <p:cNvSpPr txBox="1"/>
+          <p:nvPr/>
+        </p:nvSpPr>
+        <p:spPr>
+          <a:xfrm>
+            <a:off x="1252728" y="2697480"/>
+            <a:ext cx="1463040" cy="685800"/>
+          </a:xfrm>
+          <a:prstGeom prst="rect">
+            <a:avLst/>
+          </a:prstGeom>
+          <a:noFill/>
+        </p:spPr>
+        <p:txBody>
+          <a:bodyPr wrap="square">
+            <a:spAutoFit/>
+          </a:bodyPr>
+          <a:lstStyle/>
+          <a:p>
+            <a:pPr algn="l"/>
+            <a:r>
+              <a:rPr sz="4000" b="1">
+                <a:solidFill>
+                  <a:srgbClr val="9E2A25"/>
+                </a:solidFill>
+                <a:latin typeface="Microsoft YaHei"/>
+              </a:rPr>
+              <a:t>01</a:t>
+            </a:r>
+          </a:p>
+        </p:txBody>
+      </p:sp>
+      <p:sp>
+        <p:nvSpPr>
+          <p:cNvPr id="8" name="TextBox 7"/>
+          <p:cNvSpPr txBox="1"/>
+          <p:nvPr/>
+        </p:nvSpPr>
+        <p:spPr>
+          <a:xfrm>
+            <a:off x="1252728" y="3520440"/>
+            <a:ext cx="2331720" cy="411480"/>
+          </a:xfrm>
+          <a:prstGeom prst="rect">
+            <a:avLst/>
+          </a:prstGeom>
+          <a:noFill/>
+        </p:spPr>
+        <p:txBody>
+          <a:bodyPr wrap="square">
+            <a:spAutoFit/>
+          </a:bodyPr>
+          <a:lstStyle/>
+          <a:p>
+            <a:pPr algn="l"/>
+            <a:r>
+              <a:rPr sz="2000" b="1">
+                <a:solidFill>
+                  <a:srgbClr val="1B2A3A"/>
+                </a:solidFill>
+                <a:latin typeface="Microsoft YaHei"/>
+              </a:rPr>
+              <a:t>查基线</a:t>
+            </a:r>
+          </a:p>
+        </p:txBody>
+      </p:sp>
+      <p:sp>
+        <p:nvSpPr>
+          <p:cNvPr id="9" name="TextBox 8"/>
+          <p:cNvSpPr txBox="1"/>
+          <p:nvPr/>
+        </p:nvSpPr>
+        <p:spPr>
+          <a:xfrm>
+            <a:off x="1252728" y="3977639"/>
+            <a:ext cx="2331720" cy="685800"/>
+          </a:xfrm>
+          <a:prstGeom prst="rect">
+            <a:avLst/>
+          </a:prstGeom>
+          <a:noFill/>
+        </p:spPr>
+        <p:txBody>
+          <a:bodyPr wrap="square">
+            <a:spAutoFit/>
+          </a:bodyPr>
+          <a:lstStyle/>
+          <a:p>
+            <a:pPr algn="l">
+              <a:lnSpc>
+                <a:spcPct val="135000"/>
+              </a:lnSpc>
+            </a:pPr>
+            <a:r>
+              <a:rPr sz="1250" b="0">
+                <a:solidFill>
+                  <a:srgbClr val="7C8692"/>
+                </a:solidFill>
+                <a:latin typeface="Microsoft YaHei"/>
+              </a:rPr>
+              <a:t>脚本判定上一版是谁
+下一版叫什么，不手算</a:t>
+            </a:r>
+          </a:p>
+        </p:txBody>
+      </p:sp>
+      <p:sp>
+        <p:nvSpPr>
+          <p:cNvPr id="10" name="Chevron 9"/>
+          <p:cNvSpPr/>
+          <p:nvPr/>
+        </p:nvSpPr>
+        <p:spPr>
+          <a:xfrm>
+            <a:off x="4041648" y="3401568"/>
+            <a:ext cx="320040" cy="384048"/>
+          </a:xfrm>
+          <a:prstGeom prst="chevron">
+            <a:avLst/>
+          </a:prstGeom>
+          <a:solidFill>
+            <a:srgbClr val="9E2A25"/>
+          </a:solidFill>
+          <a:ln>
+            <a:noFill/>
+          </a:ln>
+          <a:effectLst/>
+        </p:spPr>
+        <p:style>
+          <a:lnRef idx="1">
+            <a:schemeClr val="accent1"/>
+          </a:lnRef>
+          <a:fillRef idx="3">
+            <a:schemeClr val="accent1"/>
+          </a:fillRef>
+          <a:effectRef idx="2">
+            <a:schemeClr val="accent1"/>
+          </a:effectRef>
+          <a:fontRef idx="minor">
+            <a:schemeClr val="lt1"/>
+          </a:fontRef>
+        </p:style>
+        <p:txBody>
+          <a:bodyPr rtlCol="0" anchor="ctr"/>
+          <a:lstStyle/>
+          <a:p>
+            <a:pPr algn="ctr"/>
+          </a:p>
+        </p:txBody>
+      </p:sp>
+      <p:sp>
+        <p:nvSpPr>
+          <p:cNvPr id="11" name="Rectangle 10"/>
+          <p:cNvSpPr/>
+          <p:nvPr/>
+        </p:nvSpPr>
+        <p:spPr>
+          <a:xfrm>
+            <a:off x="4471416" y="2468880"/>
+            <a:ext cx="3063240" cy="2240280"/>
+          </a:xfrm>
+          <a:prstGeom prst="rect">
+            <a:avLst/>
+          </a:prstGeom>
+          <a:solidFill>
+            <a:srgbClr val="FFFFFF"/>
+          </a:solidFill>
+          <a:ln w="12700">
+            <a:solidFill>
+              <a:srgbClr val="E2D9C4"/>
+            </a:solidFill>
+          </a:ln>
+          <a:effectLst/>
+        </p:spPr>
+        <p:style>
+          <a:lnRef idx="1">
+            <a:schemeClr val="accent1"/>
+          </a:lnRef>
+          <a:fillRef idx="3">
+            <a:schemeClr val="accent1"/>
+          </a:fillRef>
+          <a:effectRef idx="2">
+            <a:schemeClr val="accent1"/>
+          </a:effectRef>
+          <a:fontRef idx="minor">
+            <a:schemeClr val="lt1"/>
+          </a:fontRef>
+        </p:style>
+        <p:txBody>
+          <a:bodyPr rtlCol="0" anchor="ctr"/>
+          <a:lstStyle/>
+          <a:p>
+            <a:pPr algn="ctr"/>
+          </a:p>
+        </p:txBody>
+      </p:sp>
+      <p:sp>
+        <p:nvSpPr>
+          <p:cNvPr id="12" name="TextBox 11"/>
+          <p:cNvSpPr txBox="1"/>
+          <p:nvPr/>
+        </p:nvSpPr>
+        <p:spPr>
+          <a:xfrm>
+            <a:off x="4855464" y="2697480"/>
+            <a:ext cx="1463040" cy="685800"/>
+          </a:xfrm>
+          <a:prstGeom prst="rect">
+            <a:avLst/>
+          </a:prstGeom>
+          <a:noFill/>
+        </p:spPr>
+        <p:txBody>
+          <a:bodyPr wrap="square">
+            <a:spAutoFit/>
+          </a:bodyPr>
+          <a:lstStyle/>
+          <a:p>
+            <a:pPr algn="l"/>
+            <a:r>
+              <a:rPr sz="4000" b="1">
+                <a:solidFill>
+                  <a:srgbClr val="9E2A25"/>
+                </a:solidFill>
+                <a:latin typeface="Microsoft YaHei"/>
+              </a:rPr>
+              <a:t>02</a:t>
+            </a:r>
+          </a:p>
+        </p:txBody>
+      </p:sp>
+      <p:sp>
+        <p:nvSpPr>
+          <p:cNvPr id="13" name="TextBox 12"/>
+          <p:cNvSpPr txBox="1"/>
+          <p:nvPr/>
+        </p:nvSpPr>
+        <p:spPr>
+          <a:xfrm>
+            <a:off x="4855464" y="3520440"/>
+            <a:ext cx="2331720" cy="411480"/>
+          </a:xfrm>
+          <a:prstGeom prst="rect">
+            <a:avLst/>
+          </a:prstGeom>
+          <a:noFill/>
+        </p:spPr>
+        <p:txBody>
+          <a:bodyPr wrap="square">
+            <a:spAutoFit/>
+          </a:bodyPr>
+          <a:lstStyle/>
+          <a:p>
+            <a:pPr algn="l"/>
+            <a:r>
+              <a:rPr sz="2000" b="1">
+                <a:solidFill>
+                  <a:srgbClr val="1B2A3A"/>
+                </a:solidFill>
+                <a:latin typeface="Microsoft YaHei"/>
+              </a:rPr>
+              <a:t>开新版本</a:t>
+            </a:r>
+          </a:p>
+        </p:txBody>
+      </p:sp>
+      <p:sp>
+        <p:nvSpPr>
+          <p:cNvPr id="14" name="TextBox 13"/>
+          <p:cNvSpPr txBox="1"/>
+          <p:nvPr/>
+        </p:nvSpPr>
+        <p:spPr>
+          <a:xfrm>
+            <a:off x="4855464" y="3977639"/>
+            <a:ext cx="2331720" cy="685800"/>
+          </a:xfrm>
+          <a:prstGeom prst="rect">
+            <a:avLst/>
+          </a:prstGeom>
+          <a:noFill/>
+        </p:spPr>
+        <p:txBody>
+          <a:bodyPr wrap="square">
+            <a:spAutoFit/>
+          </a:bodyPr>
+          <a:lstStyle/>
+          <a:p>
+            <a:pPr algn="l">
+              <a:lnSpc>
+                <a:spcPct val="135000"/>
+              </a:lnSpc>
+            </a:pPr>
+            <a:r>
+              <a:rPr sz="1250" b="0">
+                <a:solidFill>
+                  <a:srgbClr val="7C8692"/>
+                </a:solidFill>
+                <a:latin typeface="Microsoft YaHei"/>
+              </a:rPr>
+              <a:t>以基线为蓝本拷贝一份
+原版与旧版本原地不动</a:t>
+            </a:r>
+          </a:p>
+        </p:txBody>
+      </p:sp>
+      <p:sp>
+        <p:nvSpPr>
+          <p:cNvPr id="15" name="Chevron 14"/>
+          <p:cNvSpPr/>
+          <p:nvPr/>
+        </p:nvSpPr>
+        <p:spPr>
+          <a:xfrm>
+            <a:off x="7644383" y="3401568"/>
+            <a:ext cx="320040" cy="384048"/>
+          </a:xfrm>
+          <a:prstGeom prst="chevron">
+            <a:avLst/>
+          </a:prstGeom>
+          <a:solidFill>
+            <a:srgbClr val="9E2A25"/>
+          </a:solidFill>
+          <a:ln>
+            <a:noFill/>
+          </a:ln>
+          <a:effectLst/>
+        </p:spPr>
+        <p:style>
+          <a:lnRef idx="1">
+            <a:schemeClr val="accent1"/>
+          </a:lnRef>
+          <a:fillRef idx="3">
+            <a:schemeClr val="accent1"/>
+          </a:fillRef>
+          <a:effectRef idx="2">
+            <a:schemeClr val="accent1"/>
+          </a:effectRef>
+          <a:fontRef idx="minor">
+            <a:schemeClr val="lt1"/>
+          </a:fontRef>
+        </p:style>
+        <p:txBody>
+          <a:bodyPr rtlCol="0" anchor="ctr"/>
+          <a:lstStyle/>
+          <a:p>
+            <a:pPr algn="ctr"/>
+          </a:p>
+        </p:txBody>
+      </p:sp>
+      <p:sp>
+        <p:nvSpPr>
+          <p:cNvPr id="16" name="Rectangle 15"/>
+          <p:cNvSpPr/>
+          <p:nvPr/>
+        </p:nvSpPr>
+        <p:spPr>
+          <a:xfrm>
+            <a:off x="8074152" y="2468880"/>
+            <a:ext cx="3063240" cy="2240280"/>
+          </a:xfrm>
+          <a:prstGeom prst="rect">
+            <a:avLst/>
+          </a:prstGeom>
+          <a:solidFill>
+            <a:srgbClr val="FFFFFF"/>
+          </a:solidFill>
+          <a:ln w="12700">
+            <a:solidFill>
+              <a:srgbClr val="E2D9C4"/>
+            </a:solidFill>
+          </a:ln>
+          <a:effectLst/>
+        </p:spPr>
+        <p:style>
+          <a:lnRef idx="1">
+            <a:schemeClr val="accent1"/>
+          </a:lnRef>
+          <a:fillRef idx="3">
+            <a:schemeClr val="accent1"/>
+          </a:fillRef>
+          <a:effectRef idx="2">
+            <a:schemeClr val="accent1"/>
+          </a:effectRef>
+          <a:fontRef idx="minor">
+            <a:schemeClr val="lt1"/>
+          </a:fontRef>
+        </p:style>
+        <p:txBody>
+          <a:bodyPr rtlCol="0" anchor="ctr"/>
+          <a:lstStyle/>
+          <a:p>
+            <a:pPr algn="ctr"/>
+          </a:p>
+        </p:txBody>
+      </p:sp>
+      <p:sp>
+        <p:nvSpPr>
+          <p:cNvPr id="17" name="TextBox 16"/>
+          <p:cNvSpPr txBox="1"/>
+          <p:nvPr/>
+        </p:nvSpPr>
+        <p:spPr>
+          <a:xfrm>
+            <a:off x="8458200" y="2697480"/>
+            <a:ext cx="1463040" cy="685800"/>
+          </a:xfrm>
+          <a:prstGeom prst="rect">
+            <a:avLst/>
+          </a:prstGeom>
+          <a:noFill/>
+        </p:spPr>
+        <p:txBody>
+          <a:bodyPr wrap="square">
+            <a:spAutoFit/>
+          </a:bodyPr>
+          <a:lstStyle/>
+          <a:p>
+            <a:pPr algn="l"/>
+            <a:r>
+              <a:rPr sz="4000" b="1">
+                <a:solidFill>
+                  <a:srgbClr val="9E2A25"/>
+                </a:solidFill>
+                <a:latin typeface="Microsoft YaHei"/>
+              </a:rPr>
+              <a:t>03</a:t>
+            </a:r>
+          </a:p>
+        </p:txBody>
+      </p:sp>
+      <p:sp>
+        <p:nvSpPr>
+          <p:cNvPr id="18" name="TextBox 17"/>
+          <p:cNvSpPr txBox="1"/>
+          <p:nvPr/>
+        </p:nvSpPr>
+        <p:spPr>
+          <a:xfrm>
+            <a:off x="8458200" y="3520440"/>
+            <a:ext cx="2331720" cy="411480"/>
+          </a:xfrm>
+          <a:prstGeom prst="rect">
+            <a:avLst/>
+          </a:prstGeom>
+          <a:noFill/>
+        </p:spPr>
+        <p:txBody>
+          <a:bodyPr wrap="square">
+            <a:spAutoFit/>
+          </a:bodyPr>
+          <a:lstStyle/>
+          <a:p>
+            <a:pPr algn="l"/>
+            <a:r>
+              <a:rPr sz="2000" b="1">
+                <a:solidFill>
+                  <a:srgbClr val="1B2A3A"/>
+                </a:solidFill>
+                <a:latin typeface="Microsoft YaHei"/>
+              </a:rPr>
+              <a:t>渲染对比</a:t>
+            </a:r>
+          </a:p>
+        </p:txBody>
+      </p:sp>
+      <p:sp>
+        <p:nvSpPr>
+          <p:cNvPr id="19" name="TextBox 18"/>
+          <p:cNvSpPr txBox="1"/>
+          <p:nvPr/>
+        </p:nvSpPr>
+        <p:spPr>
+          <a:xfrm>
+            <a:off x="8458200" y="3977639"/>
+            <a:ext cx="2331720" cy="685800"/>
+          </a:xfrm>
+          <a:prstGeom prst="rect">
+            <a:avLst/>
+          </a:prstGeom>
+          <a:noFill/>
+        </p:spPr>
+        <p:txBody>
+          <a:bodyPr wrap="square">
+            <a:spAutoFit/>
+          </a:bodyPr>
+          <a:lstStyle/>
+          <a:p>
+            <a:pPr algn="l">
+              <a:lnSpc>
+                <a:spcPct val="135000"/>
+              </a:lnSpc>
+            </a:pPr>
+            <a:r>
+              <a:rPr sz="1250" b="0">
+                <a:solidFill>
+                  <a:srgbClr val="7C8692"/>
+                </a:solidFill>
+                <a:latin typeface="Microsoft YaHei"/>
+              </a:rPr>
+              <a:t>按类型选渲染模式
+输出到 .mavis-compare/</a:t>
+            </a:r>
+          </a:p>
+        </p:txBody>
+      </p:sp>
+      <p:sp>
+        <p:nvSpPr>
+          <p:cNvPr id="20" name="Rectangle 19"/>
+          <p:cNvSpPr/>
+          <p:nvPr/>
+        </p:nvSpPr>
+        <p:spPr>
+          <a:xfrm>
+            <a:off x="868680" y="5074920"/>
+            <a:ext cx="10454335" cy="822960"/>
+          </a:xfrm>
+          <a:prstGeom prst="rect">
             <a:avLst/>
           </a:prstGeom>
           <a:solidFill>
@@ -4367,14 +5533,14 @@
       </p:sp>
       <p:sp>
         <p:nvSpPr>
-          <p:cNvPr id="7" name="TextBox 6"/>
+          <p:cNvPr id="21" name="TextBox 20"/>
           <p:cNvSpPr txBox="1"/>
           <p:nvPr/>
         </p:nvSpPr>
         <p:spPr>
           <a:xfrm>
-            <a:off x="731519" y="2240280"/>
-            <a:ext cx="1097280" cy="365760"/>
+            <a:off x="1325880" y="5330952"/>
+            <a:ext cx="9539935" cy="365760"/>
           </a:xfrm>
           <a:prstGeom prst="rect">
             <a:avLst/>
@@ -4389,1670 +5555,13 @@
           <a:p>
             <a:pPr algn="ctr"/>
             <a:r>
-              <a:rPr sz="1700" b="1">
+              <a:rPr sz="1500" b="0">
                 <a:solidFill>
-                  <a:srgbClr val="9E2A25"/>
+                  <a:srgbClr val="FDF6E6"/>
                 </a:solidFill>
                 <a:latin typeface="Microsoft YaHei"/>
               </a:rPr>
-              <a:t>2024</a:t>
-            </a:r>
-          </a:p>
-        </p:txBody>
-      </p:sp>
-      <p:sp>
-        <p:nvSpPr>
-          <p:cNvPr id="8" name="TextBox 7"/>
-          <p:cNvSpPr txBox="1"/>
-          <p:nvPr/>
-        </p:nvSpPr>
-        <p:spPr>
-          <a:xfrm>
-            <a:off x="594359" y="3520440"/>
-            <a:ext cx="1371600" cy="365760"/>
-          </a:xfrm>
-          <a:prstGeom prst="rect">
-            <a:avLst/>
-          </a:prstGeom>
-          <a:noFill/>
-        </p:spPr>
-        <p:txBody>
-          <a:bodyPr wrap="square">
-            <a:spAutoFit/>
-          </a:bodyPr>
-          <a:lstStyle/>
-          <a:p>
-            <a:pPr algn="ctr"/>
-            <a:r>
-              <a:rPr sz="1300" b="0">
-                <a:solidFill>
-                  <a:srgbClr val="3A3A3A"/>
-                </a:solidFill>
-                <a:latin typeface="Microsoft YaHei"/>
-              </a:rPr>
-              <a:t>第一版流程</a:t>
-            </a:r>
-          </a:p>
-        </p:txBody>
-      </p:sp>
-      <p:sp>
-        <p:nvSpPr>
-          <p:cNvPr id="9" name="Oval 8"/>
-          <p:cNvSpPr/>
-          <p:nvPr/>
-        </p:nvSpPr>
-        <p:spPr>
-          <a:xfrm>
-            <a:off x="3200400" y="2871216"/>
-            <a:ext cx="384048" cy="384048"/>
-          </a:xfrm>
-          <a:prstGeom prst="ellipse">
-            <a:avLst/>
-          </a:prstGeom>
-          <a:solidFill>
-            <a:srgbClr val="1B2A3A"/>
-          </a:solidFill>
-          <a:ln>
-            <a:noFill/>
-          </a:ln>
-          <a:effectLst/>
-        </p:spPr>
-        <p:style>
-          <a:lnRef idx="1">
-            <a:schemeClr val="accent1"/>
-          </a:lnRef>
-          <a:fillRef idx="3">
-            <a:schemeClr val="accent1"/>
-          </a:fillRef>
-          <a:effectRef idx="2">
-            <a:schemeClr val="accent1"/>
-          </a:effectRef>
-          <a:fontRef idx="minor">
-            <a:schemeClr val="lt1"/>
-          </a:fontRef>
-        </p:style>
-        <p:txBody>
-          <a:bodyPr rtlCol="0" anchor="ctr"/>
-          <a:lstStyle/>
-          <a:p>
-            <a:pPr algn="ctr"/>
-          </a:p>
-        </p:txBody>
-      </p:sp>
-      <p:sp>
-        <p:nvSpPr>
-          <p:cNvPr id="10" name="TextBox 9"/>
-          <p:cNvSpPr txBox="1"/>
-          <p:nvPr/>
-        </p:nvSpPr>
-        <p:spPr>
-          <a:xfrm>
-            <a:off x="2880360" y="2240280"/>
-            <a:ext cx="1097280" cy="365760"/>
-          </a:xfrm>
-          <a:prstGeom prst="rect">
-            <a:avLst/>
-          </a:prstGeom>
-          <a:noFill/>
-        </p:spPr>
-        <p:txBody>
-          <a:bodyPr wrap="square">
-            <a:spAutoFit/>
-          </a:bodyPr>
-          <a:lstStyle/>
-          <a:p>
-            <a:pPr algn="ctr"/>
-            <a:r>
-              <a:rPr sz="1700" b="1">
-                <a:solidFill>
-                  <a:srgbClr val="9E2A25"/>
-                </a:solidFill>
-                <a:latin typeface="Microsoft YaHei"/>
-              </a:rPr>
-              <a:t>2025</a:t>
-            </a:r>
-          </a:p>
-        </p:txBody>
-      </p:sp>
-      <p:sp>
-        <p:nvSpPr>
-          <p:cNvPr id="11" name="TextBox 10"/>
-          <p:cNvSpPr txBox="1"/>
-          <p:nvPr/>
-        </p:nvSpPr>
-        <p:spPr>
-          <a:xfrm>
-            <a:off x="2743200" y="3520440"/>
-            <a:ext cx="1371600" cy="365760"/>
-          </a:xfrm>
-          <a:prstGeom prst="rect">
-            <a:avLst/>
-          </a:prstGeom>
-          <a:noFill/>
-        </p:spPr>
-        <p:txBody>
-          <a:bodyPr wrap="square">
-            <a:spAutoFit/>
-          </a:bodyPr>
-          <a:lstStyle/>
-          <a:p>
-            <a:pPr algn="ctr"/>
-            <a:r>
-              <a:rPr sz="1300" b="0">
-                <a:solidFill>
-                  <a:srgbClr val="3A3A3A"/>
-                </a:solidFill>
-                <a:latin typeface="Microsoft YaHei"/>
-              </a:rPr>
-              <a:t>补图例</a:t>
-            </a:r>
-          </a:p>
-        </p:txBody>
-      </p:sp>
-      <p:sp>
-        <p:nvSpPr>
-          <p:cNvPr id="12" name="Oval 11"/>
-          <p:cNvSpPr/>
-          <p:nvPr/>
-        </p:nvSpPr>
-        <p:spPr>
-          <a:xfrm>
-            <a:off x="5349240" y="2871216"/>
-            <a:ext cx="384048" cy="384048"/>
-          </a:xfrm>
-          <a:prstGeom prst="ellipse">
-            <a:avLst/>
-          </a:prstGeom>
-          <a:solidFill>
-            <a:srgbClr val="1B2A3A"/>
-          </a:solidFill>
-          <a:ln>
-            <a:noFill/>
-          </a:ln>
-          <a:effectLst/>
-        </p:spPr>
-        <p:style>
-          <a:lnRef idx="1">
-            <a:schemeClr val="accent1"/>
-          </a:lnRef>
-          <a:fillRef idx="3">
-            <a:schemeClr val="accent1"/>
-          </a:fillRef>
-          <a:effectRef idx="2">
-            <a:schemeClr val="accent1"/>
-          </a:effectRef>
-          <a:fontRef idx="minor">
-            <a:schemeClr val="lt1"/>
-          </a:fontRef>
-        </p:style>
-        <p:txBody>
-          <a:bodyPr rtlCol="0" anchor="ctr"/>
-          <a:lstStyle/>
-          <a:p>
-            <a:pPr algn="ctr"/>
-          </a:p>
-        </p:txBody>
-      </p:sp>
-      <p:sp>
-        <p:nvSpPr>
-          <p:cNvPr id="13" name="TextBox 12"/>
-          <p:cNvSpPr txBox="1"/>
-          <p:nvPr/>
-        </p:nvSpPr>
-        <p:spPr>
-          <a:xfrm>
-            <a:off x="5029200" y="2240280"/>
-            <a:ext cx="1097280" cy="365760"/>
-          </a:xfrm>
-          <a:prstGeom prst="rect">
-            <a:avLst/>
-          </a:prstGeom>
-          <a:noFill/>
-        </p:spPr>
-        <p:txBody>
-          <a:bodyPr wrap="square">
-            <a:spAutoFit/>
-          </a:bodyPr>
-          <a:lstStyle/>
-          <a:p>
-            <a:pPr algn="ctr"/>
-            <a:r>
-              <a:rPr sz="1700" b="1">
-                <a:solidFill>
-                  <a:srgbClr val="9E2A25"/>
-                </a:solidFill>
-                <a:latin typeface="Microsoft YaHei"/>
-              </a:rPr>
-              <a:t>2026 Q1</a:t>
-            </a:r>
-          </a:p>
-        </p:txBody>
-      </p:sp>
-      <p:sp>
-        <p:nvSpPr>
-          <p:cNvPr id="14" name="TextBox 13"/>
-          <p:cNvSpPr txBox="1"/>
-          <p:nvPr/>
-        </p:nvSpPr>
-        <p:spPr>
-          <a:xfrm>
-            <a:off x="4892040" y="3520440"/>
-            <a:ext cx="1371600" cy="365760"/>
-          </a:xfrm>
-          <a:prstGeom prst="rect">
-            <a:avLst/>
-          </a:prstGeom>
-          <a:noFill/>
-        </p:spPr>
-        <p:txBody>
-          <a:bodyPr wrap="square">
-            <a:spAutoFit/>
-          </a:bodyPr>
-          <a:lstStyle/>
-          <a:p>
-            <a:pPr algn="ctr"/>
-            <a:r>
-              <a:rPr sz="1300" b="0">
-                <a:solidFill>
-                  <a:srgbClr val="3A3A3A"/>
-                </a:solidFill>
-                <a:latin typeface="Microsoft YaHei"/>
-              </a:rPr>
-              <a:t>加 PPT</a:t>
-            </a:r>
-          </a:p>
-        </p:txBody>
-      </p:sp>
-      <p:sp>
-        <p:nvSpPr>
-          <p:cNvPr id="15" name="Oval 14"/>
-          <p:cNvSpPr/>
-          <p:nvPr/>
-        </p:nvSpPr>
-        <p:spPr>
-          <a:xfrm>
-            <a:off x="7498080" y="2871216"/>
-            <a:ext cx="384048" cy="384048"/>
-          </a:xfrm>
-          <a:prstGeom prst="ellipse">
-            <a:avLst/>
-          </a:prstGeom>
-          <a:solidFill>
-            <a:srgbClr val="1B2A3A"/>
-          </a:solidFill>
-          <a:ln>
-            <a:noFill/>
-          </a:ln>
-          <a:effectLst/>
-        </p:spPr>
-        <p:style>
-          <a:lnRef idx="1">
-            <a:schemeClr val="accent1"/>
-          </a:lnRef>
-          <a:fillRef idx="3">
-            <a:schemeClr val="accent1"/>
-          </a:fillRef>
-          <a:effectRef idx="2">
-            <a:schemeClr val="accent1"/>
-          </a:effectRef>
-          <a:fontRef idx="minor">
-            <a:schemeClr val="lt1"/>
-          </a:fontRef>
-        </p:style>
-        <p:txBody>
-          <a:bodyPr rtlCol="0" anchor="ctr"/>
-          <a:lstStyle/>
-          <a:p>
-            <a:pPr algn="ctr"/>
-          </a:p>
-        </p:txBody>
-      </p:sp>
-      <p:sp>
-        <p:nvSpPr>
-          <p:cNvPr id="16" name="TextBox 15"/>
-          <p:cNvSpPr txBox="1"/>
-          <p:nvPr/>
-        </p:nvSpPr>
-        <p:spPr>
-          <a:xfrm>
-            <a:off x="7178040" y="2240280"/>
-            <a:ext cx="1097280" cy="365760"/>
-          </a:xfrm>
-          <a:prstGeom prst="rect">
-            <a:avLst/>
-          </a:prstGeom>
-          <a:noFill/>
-        </p:spPr>
-        <p:txBody>
-          <a:bodyPr wrap="square">
-            <a:spAutoFit/>
-          </a:bodyPr>
-          <a:lstStyle/>
-          <a:p>
-            <a:pPr algn="ctr"/>
-            <a:r>
-              <a:rPr sz="1700" b="1">
-                <a:solidFill>
-                  <a:srgbClr val="9E2A25"/>
-                </a:solidFill>
-                <a:latin typeface="Microsoft YaHei"/>
-              </a:rPr>
-              <a:t>2026 Q2</a:t>
-            </a:r>
-          </a:p>
-        </p:txBody>
-      </p:sp>
-      <p:sp>
-        <p:nvSpPr>
-          <p:cNvPr id="17" name="TextBox 16"/>
-          <p:cNvSpPr txBox="1"/>
-          <p:nvPr/>
-        </p:nvSpPr>
-        <p:spPr>
-          <a:xfrm>
-            <a:off x="7040880" y="3520440"/>
-            <a:ext cx="1371600" cy="365760"/>
-          </a:xfrm>
-          <a:prstGeom prst="rect">
-            <a:avLst/>
-          </a:prstGeom>
-          <a:noFill/>
-        </p:spPr>
-        <p:txBody>
-          <a:bodyPr wrap="square">
-            <a:spAutoFit/>
-          </a:bodyPr>
-          <a:lstStyle/>
-          <a:p>
-            <a:pPr algn="ctr"/>
-            <a:r>
-              <a:rPr sz="1300" b="0">
-                <a:solidFill>
-                  <a:srgbClr val="3A3A3A"/>
-                </a:solidFill>
-                <a:latin typeface="Microsoft YaHei"/>
-              </a:rPr>
-              <a:t>加 Word</a:t>
-            </a:r>
-          </a:p>
-        </p:txBody>
-      </p:sp>
-      <p:sp>
-        <p:nvSpPr>
-          <p:cNvPr id="18" name="Oval 17"/>
-          <p:cNvSpPr/>
-          <p:nvPr/>
-        </p:nvSpPr>
-        <p:spPr>
-          <a:xfrm>
-            <a:off x="9646920" y="2871216"/>
-            <a:ext cx="384048" cy="384048"/>
-          </a:xfrm>
-          <a:prstGeom prst="ellipse">
-            <a:avLst/>
-          </a:prstGeom>
-          <a:solidFill>
-            <a:srgbClr val="1B2A3A"/>
-          </a:solidFill>
-          <a:ln>
-            <a:noFill/>
-          </a:ln>
-          <a:effectLst/>
-        </p:spPr>
-        <p:style>
-          <a:lnRef idx="1">
-            <a:schemeClr val="accent1"/>
-          </a:lnRef>
-          <a:fillRef idx="3">
-            <a:schemeClr val="accent1"/>
-          </a:fillRef>
-          <a:effectRef idx="2">
-            <a:schemeClr val="accent1"/>
-          </a:effectRef>
-          <a:fontRef idx="minor">
-            <a:schemeClr val="lt1"/>
-          </a:fontRef>
-        </p:style>
-        <p:txBody>
-          <a:bodyPr rtlCol="0" anchor="ctr"/>
-          <a:lstStyle/>
-          <a:p>
-            <a:pPr algn="ctr"/>
-          </a:p>
-        </p:txBody>
-      </p:sp>
-      <p:sp>
-        <p:nvSpPr>
-          <p:cNvPr id="19" name="TextBox 18"/>
-          <p:cNvSpPr txBox="1"/>
-          <p:nvPr/>
-        </p:nvSpPr>
-        <p:spPr>
-          <a:xfrm>
-            <a:off x="9326880" y="2240280"/>
-            <a:ext cx="1097280" cy="365760"/>
-          </a:xfrm>
-          <a:prstGeom prst="rect">
-            <a:avLst/>
-          </a:prstGeom>
-          <a:noFill/>
-        </p:spPr>
-        <p:txBody>
-          <a:bodyPr wrap="square">
-            <a:spAutoFit/>
-          </a:bodyPr>
-          <a:lstStyle/>
-          <a:p>
-            <a:pPr algn="ctr"/>
-            <a:r>
-              <a:rPr sz="1700" b="1">
-                <a:solidFill>
-                  <a:srgbClr val="9E2A25"/>
-                </a:solidFill>
-                <a:latin typeface="Microsoft YaHei"/>
-              </a:rPr>
-              <a:t>现在</a:t>
-            </a:r>
-          </a:p>
-        </p:txBody>
-      </p:sp>
-      <p:sp>
-        <p:nvSpPr>
-          <p:cNvPr id="20" name="TextBox 19"/>
-          <p:cNvSpPr txBox="1"/>
-          <p:nvPr/>
-        </p:nvSpPr>
-        <p:spPr>
-          <a:xfrm>
-            <a:off x="9189720" y="3520440"/>
-            <a:ext cx="1371600" cy="365760"/>
-          </a:xfrm>
-          <a:prstGeom prst="rect">
-            <a:avLst/>
-          </a:prstGeom>
-          <a:noFill/>
-        </p:spPr>
-        <p:txBody>
-          <a:bodyPr wrap="square">
-            <a:spAutoFit/>
-          </a:bodyPr>
-          <a:lstStyle/>
-          <a:p>
-            <a:pPr algn="ctr"/>
-            <a:r>
-              <a:rPr sz="1300" b="0">
-                <a:solidFill>
-                  <a:srgbClr val="3A3A3A"/>
-                </a:solidFill>
-                <a:latin typeface="Microsoft YaHei"/>
-              </a:rPr>
-              <a:t>公开可用</a:t>
-            </a:r>
-          </a:p>
-        </p:txBody>
-      </p:sp>
-    </p:spTree>
-  </p:cSld>
-  <p:clrMapOvr>
-    <a:masterClrMapping/>
-  </p:clrMapOvr>
-</p:sld>
-</file>
-
-<file path=ppt/slides/slide4.xml><?xml version="1.0" encoding="utf-8"?>
-<p:sld xmlns:a="http://schemas.openxmlformats.org/drawingml/2006/main" xmlns:p="http://schemas.openxmlformats.org/presentationml/2006/main" xmlns:r="http://schemas.openxmlformats.org/officeDocument/2006/relationships">
-  <p:cSld>
-    <p:spTree>
-      <p:nvGrpSpPr>
-        <p:cNvPr id="1" name=""/>
-        <p:cNvGrpSpPr/>
-        <p:nvPr/>
-      </p:nvGrpSpPr>
-      <p:grpSpPr/>
-      <p:sp>
-        <p:nvSpPr>
-          <p:cNvPr id="2" name="Rectangle 1"/>
-          <p:cNvSpPr/>
-          <p:nvPr/>
-        </p:nvSpPr>
-        <p:spPr>
-          <a:xfrm>
-            <a:off x="0" y="0"/>
-            <a:ext cx="12191695" cy="6858000"/>
-          </a:xfrm>
-          <a:prstGeom prst="rect">
-            <a:avLst/>
-          </a:prstGeom>
-          <a:solidFill>
-            <a:srgbClr val="FDF6E6"/>
-          </a:solidFill>
-          <a:ln>
-            <a:noFill/>
-          </a:ln>
-          <a:effectLst/>
-        </p:spPr>
-        <p:style>
-          <a:lnRef idx="1">
-            <a:schemeClr val="accent1"/>
-          </a:lnRef>
-          <a:fillRef idx="3">
-            <a:schemeClr val="accent1"/>
-          </a:fillRef>
-          <a:effectRef idx="2">
-            <a:schemeClr val="accent1"/>
-          </a:effectRef>
-          <a:fontRef idx="minor">
-            <a:schemeClr val="lt1"/>
-          </a:fontRef>
-        </p:style>
-        <p:txBody>
-          <a:bodyPr rtlCol="0" anchor="ctr"/>
-          <a:lstStyle/>
-          <a:p>
-            <a:pPr algn="ctr"/>
-          </a:p>
-        </p:txBody>
-      </p:sp>
-      <p:sp>
-        <p:nvSpPr>
-          <p:cNvPr id="3" name="TextBox 2"/>
-          <p:cNvSpPr txBox="1"/>
-          <p:nvPr/>
-        </p:nvSpPr>
-        <p:spPr>
-          <a:xfrm>
-            <a:off x="640080" y="457200"/>
-            <a:ext cx="8229600" cy="457200"/>
-          </a:xfrm>
-          <a:prstGeom prst="rect">
-            <a:avLst/>
-          </a:prstGeom>
-          <a:noFill/>
-        </p:spPr>
-        <p:txBody>
-          <a:bodyPr wrap="square">
-            <a:spAutoFit/>
-          </a:bodyPr>
-          <a:lstStyle/>
-          <a:p>
-            <a:pPr algn="l"/>
-            <a:r>
-              <a:rPr sz="1500" b="1">
-                <a:solidFill>
-                  <a:srgbClr val="9E2A25"/>
-                </a:solidFill>
-                <a:latin typeface="Microsoft YaHei"/>
-              </a:rPr>
-              <a:t>机制  HOW IT WORKS</a:t>
-            </a:r>
-          </a:p>
-        </p:txBody>
-      </p:sp>
-      <p:sp>
-        <p:nvSpPr>
-          <p:cNvPr id="4" name="TextBox 3"/>
-          <p:cNvSpPr txBox="1"/>
-          <p:nvPr/>
-        </p:nvSpPr>
-        <p:spPr>
-          <a:xfrm>
-            <a:off x="640080" y="914400"/>
-            <a:ext cx="8229600" cy="640080"/>
-          </a:xfrm>
-          <a:prstGeom prst="rect">
-            <a:avLst/>
-          </a:prstGeom>
-          <a:noFill/>
-        </p:spPr>
-        <p:txBody>
-          <a:bodyPr wrap="square">
-            <a:spAutoFit/>
-          </a:bodyPr>
-          <a:lstStyle/>
-          <a:p>
-            <a:pPr algn="l"/>
-            <a:r>
-              <a:rPr sz="3200" b="1">
-                <a:solidFill>
-                  <a:srgbClr val="1B2A3A"/>
-                </a:solidFill>
-                <a:latin typeface="Microsoft YaHei"/>
-              </a:rPr>
-              <a:t>三步走完一版迭代</a:t>
-            </a:r>
-          </a:p>
-        </p:txBody>
-      </p:sp>
-      <p:sp>
-        <p:nvSpPr>
-          <p:cNvPr id="5" name="Rectangle 4"/>
-          <p:cNvSpPr/>
-          <p:nvPr/>
-        </p:nvSpPr>
-        <p:spPr>
-          <a:xfrm>
-            <a:off x="640080" y="1920240"/>
-            <a:ext cx="5394960" cy="3291840"/>
-          </a:xfrm>
-          <a:prstGeom prst="rect">
-            <a:avLst/>
-          </a:prstGeom>
-          <a:solidFill>
-            <a:srgbClr val="1B2A3A"/>
-          </a:solidFill>
-          <a:ln>
-            <a:noFill/>
-          </a:ln>
-          <a:effectLst/>
-        </p:spPr>
-        <p:style>
-          <a:lnRef idx="1">
-            <a:schemeClr val="accent1"/>
-          </a:lnRef>
-          <a:fillRef idx="3">
-            <a:schemeClr val="accent1"/>
-          </a:fillRef>
-          <a:effectRef idx="2">
-            <a:schemeClr val="accent1"/>
-          </a:effectRef>
-          <a:fontRef idx="minor">
-            <a:schemeClr val="lt1"/>
-          </a:fontRef>
-        </p:style>
-        <p:txBody>
-          <a:bodyPr rtlCol="0" anchor="ctr"/>
-          <a:lstStyle/>
-          <a:p>
-            <a:pPr algn="ctr"/>
-          </a:p>
-        </p:txBody>
-      </p:sp>
-      <p:sp>
-        <p:nvSpPr>
-          <p:cNvPr id="6" name="Rectangle 5"/>
-          <p:cNvSpPr/>
-          <p:nvPr/>
-        </p:nvSpPr>
-        <p:spPr>
-          <a:xfrm>
-            <a:off x="6355080" y="1920240"/>
-            <a:ext cx="5394960" cy="3291840"/>
-          </a:xfrm>
-          <a:prstGeom prst="rect">
-            <a:avLst/>
-          </a:prstGeom>
-          <a:solidFill>
-            <a:srgbClr val="FFFFFF"/>
-          </a:solidFill>
-          <a:ln>
-            <a:noFill/>
-          </a:ln>
-          <a:effectLst/>
-        </p:spPr>
-        <p:style>
-          <a:lnRef idx="1">
-            <a:schemeClr val="accent1"/>
-          </a:lnRef>
-          <a:fillRef idx="3">
-            <a:schemeClr val="accent1"/>
-          </a:fillRef>
-          <a:effectRef idx="2">
-            <a:schemeClr val="accent1"/>
-          </a:effectRef>
-          <a:fontRef idx="minor">
-            <a:schemeClr val="lt1"/>
-          </a:fontRef>
-        </p:style>
-        <p:txBody>
-          <a:bodyPr rtlCol="0" anchor="ctr"/>
-          <a:lstStyle/>
-          <a:p>
-            <a:pPr algn="ctr"/>
-          </a:p>
-        </p:txBody>
-      </p:sp>
-      <p:sp>
-        <p:nvSpPr>
-          <p:cNvPr id="7" name="Oval 6"/>
-          <p:cNvSpPr/>
-          <p:nvPr/>
-        </p:nvSpPr>
-        <p:spPr>
-          <a:xfrm>
-            <a:off x="960120" y="2331720"/>
-            <a:ext cx="274320" cy="274320"/>
-          </a:xfrm>
-          <a:prstGeom prst="ellipse">
-            <a:avLst/>
-          </a:prstGeom>
-          <a:solidFill>
-            <a:srgbClr val="9E2A25"/>
-          </a:solidFill>
-          <a:ln>
-            <a:noFill/>
-          </a:ln>
-          <a:effectLst/>
-        </p:spPr>
-        <p:style>
-          <a:lnRef idx="1">
-            <a:schemeClr val="accent1"/>
-          </a:lnRef>
-          <a:fillRef idx="3">
-            <a:schemeClr val="accent1"/>
-          </a:fillRef>
-          <a:effectRef idx="2">
-            <a:schemeClr val="accent1"/>
-          </a:effectRef>
-          <a:fontRef idx="minor">
-            <a:schemeClr val="lt1"/>
-          </a:fontRef>
-        </p:style>
-        <p:txBody>
-          <a:bodyPr rtlCol="0" anchor="ctr"/>
-          <a:lstStyle/>
-          <a:p>
-            <a:pPr algn="ctr"/>
-          </a:p>
-        </p:txBody>
-      </p:sp>
-      <p:sp>
-        <p:nvSpPr>
-          <p:cNvPr id="8" name="TextBox 7"/>
-          <p:cNvSpPr txBox="1"/>
-          <p:nvPr/>
-        </p:nvSpPr>
-        <p:spPr>
-          <a:xfrm>
-            <a:off x="1417320" y="2286000"/>
-            <a:ext cx="4480560" cy="457200"/>
-          </a:xfrm>
-          <a:prstGeom prst="rect">
-            <a:avLst/>
-          </a:prstGeom>
-          <a:noFill/>
-        </p:spPr>
-        <p:txBody>
-          <a:bodyPr wrap="square">
-            <a:spAutoFit/>
-          </a:bodyPr>
-          <a:lstStyle/>
-          <a:p>
-            <a:pPr algn="l"/>
-            <a:r>
-              <a:rPr sz="1500" b="0">
-                <a:solidFill>
-                  <a:srgbClr val="FFFFFF"/>
-                </a:solidFill>
-                <a:latin typeface="Microsoft YaHei"/>
-              </a:rPr>
-              <a:t>查基线：脚本判定，不手算版本号</a:t>
-            </a:r>
-          </a:p>
-        </p:txBody>
-      </p:sp>
-      <p:sp>
-        <p:nvSpPr>
-          <p:cNvPr id="9" name="Oval 8"/>
-          <p:cNvSpPr/>
-          <p:nvPr/>
-        </p:nvSpPr>
-        <p:spPr>
-          <a:xfrm>
-            <a:off x="960120" y="3200400"/>
-            <a:ext cx="274320" cy="274320"/>
-          </a:xfrm>
-          <a:prstGeom prst="ellipse">
-            <a:avLst/>
-          </a:prstGeom>
-          <a:solidFill>
-            <a:srgbClr val="9E2A25"/>
-          </a:solidFill>
-          <a:ln>
-            <a:noFill/>
-          </a:ln>
-          <a:effectLst/>
-        </p:spPr>
-        <p:style>
-          <a:lnRef idx="1">
-            <a:schemeClr val="accent1"/>
-          </a:lnRef>
-          <a:fillRef idx="3">
-            <a:schemeClr val="accent1"/>
-          </a:fillRef>
-          <a:effectRef idx="2">
-            <a:schemeClr val="accent1"/>
-          </a:effectRef>
-          <a:fontRef idx="minor">
-            <a:schemeClr val="lt1"/>
-          </a:fontRef>
-        </p:style>
-        <p:txBody>
-          <a:bodyPr rtlCol="0" anchor="ctr"/>
-          <a:lstStyle/>
-          <a:p>
-            <a:pPr algn="ctr"/>
-          </a:p>
-        </p:txBody>
-      </p:sp>
-      <p:sp>
-        <p:nvSpPr>
-          <p:cNvPr id="10" name="TextBox 9"/>
-          <p:cNvSpPr txBox="1"/>
-          <p:nvPr/>
-        </p:nvSpPr>
-        <p:spPr>
-          <a:xfrm>
-            <a:off x="1417320" y="3154680"/>
-            <a:ext cx="4480560" cy="457200"/>
-          </a:xfrm>
-          <a:prstGeom prst="rect">
-            <a:avLst/>
-          </a:prstGeom>
-          <a:noFill/>
-        </p:spPr>
-        <p:txBody>
-          <a:bodyPr wrap="square">
-            <a:spAutoFit/>
-          </a:bodyPr>
-          <a:lstStyle/>
-          <a:p>
-            <a:pPr algn="l"/>
-            <a:r>
-              <a:rPr sz="1500" b="0">
-                <a:solidFill>
-                  <a:srgbClr val="FFFFFF"/>
-                </a:solidFill>
-                <a:latin typeface="Microsoft YaHei"/>
-              </a:rPr>
-              <a:t>开新版本：原版字节不动</a:t>
-            </a:r>
-          </a:p>
-        </p:txBody>
-      </p:sp>
-      <p:sp>
-        <p:nvSpPr>
-          <p:cNvPr id="11" name="Oval 10"/>
-          <p:cNvSpPr/>
-          <p:nvPr/>
-        </p:nvSpPr>
-        <p:spPr>
-          <a:xfrm>
-            <a:off x="960120" y="4069079"/>
-            <a:ext cx="274320" cy="274320"/>
-          </a:xfrm>
-          <a:prstGeom prst="ellipse">
-            <a:avLst/>
-          </a:prstGeom>
-          <a:solidFill>
-            <a:srgbClr val="9E2A25"/>
-          </a:solidFill>
-          <a:ln>
-            <a:noFill/>
-          </a:ln>
-          <a:effectLst/>
-        </p:spPr>
-        <p:style>
-          <a:lnRef idx="1">
-            <a:schemeClr val="accent1"/>
-          </a:lnRef>
-          <a:fillRef idx="3">
-            <a:schemeClr val="accent1"/>
-          </a:fillRef>
-          <a:effectRef idx="2">
-            <a:schemeClr val="accent1"/>
-          </a:effectRef>
-          <a:fontRef idx="minor">
-            <a:schemeClr val="lt1"/>
-          </a:fontRef>
-        </p:style>
-        <p:txBody>
-          <a:bodyPr rtlCol="0" anchor="ctr"/>
-          <a:lstStyle/>
-          <a:p>
-            <a:pPr algn="ctr"/>
-          </a:p>
-        </p:txBody>
-      </p:sp>
-      <p:sp>
-        <p:nvSpPr>
-          <p:cNvPr id="12" name="TextBox 11"/>
-          <p:cNvSpPr txBox="1"/>
-          <p:nvPr/>
-        </p:nvSpPr>
-        <p:spPr>
-          <a:xfrm>
-            <a:off x="1417320" y="4023360"/>
-            <a:ext cx="4480560" cy="457200"/>
-          </a:xfrm>
-          <a:prstGeom prst="rect">
-            <a:avLst/>
-          </a:prstGeom>
-          <a:noFill/>
-        </p:spPr>
-        <p:txBody>
-          <a:bodyPr wrap="square">
-            <a:spAutoFit/>
-          </a:bodyPr>
-          <a:lstStyle/>
-          <a:p>
-            <a:pPr algn="l"/>
-            <a:r>
-              <a:rPr sz="1500" b="0">
-                <a:solidFill>
-                  <a:srgbClr val="FFFFFF"/>
-                </a:solidFill>
-                <a:latin typeface="Microsoft YaHei"/>
-              </a:rPr>
-              <a:t>渲染对比：图 + 汇总表</a:t>
-            </a:r>
-          </a:p>
-        </p:txBody>
-      </p:sp>
-      <p:sp>
-        <p:nvSpPr>
-          <p:cNvPr id="13" name="TextBox 12"/>
-          <p:cNvSpPr txBox="1"/>
-          <p:nvPr/>
-        </p:nvSpPr>
-        <p:spPr>
-          <a:xfrm>
-            <a:off x="6720840" y="2331720"/>
-            <a:ext cx="4663440" cy="457200"/>
-          </a:xfrm>
-          <a:prstGeom prst="rect">
-            <a:avLst/>
-          </a:prstGeom>
-          <a:noFill/>
-        </p:spPr>
-        <p:txBody>
-          <a:bodyPr wrap="square">
-            <a:spAutoFit/>
-          </a:bodyPr>
-          <a:lstStyle/>
-          <a:p>
-            <a:pPr algn="l"/>
-            <a:r>
-              <a:rPr sz="1500" b="0">
-                <a:solidFill>
-                  <a:srgbClr val="3A3A3A"/>
-                </a:solidFill>
-                <a:latin typeface="Microsoft YaHei"/>
-              </a:rPr>
-              <a:t>· 原版永远保留在原处</a:t>
-            </a:r>
-          </a:p>
-        </p:txBody>
-      </p:sp>
-      <p:sp>
-        <p:nvSpPr>
-          <p:cNvPr id="14" name="TextBox 13"/>
-          <p:cNvSpPr txBox="1"/>
-          <p:nvPr/>
-        </p:nvSpPr>
-        <p:spPr>
-          <a:xfrm>
-            <a:off x="6720840" y="3200400"/>
-            <a:ext cx="4663440" cy="457200"/>
-          </a:xfrm>
-          <a:prstGeom prst="rect">
-            <a:avLst/>
-          </a:prstGeom>
-          <a:noFill/>
-        </p:spPr>
-        <p:txBody>
-          <a:bodyPr wrap="square">
-            <a:spAutoFit/>
-          </a:bodyPr>
-          <a:lstStyle/>
-          <a:p>
-            <a:pPr algn="l"/>
-            <a:r>
-              <a:rPr sz="1500" b="0">
-                <a:solidFill>
-                  <a:srgbClr val="3A3A3A"/>
-                </a:solidFill>
-                <a:latin typeface="Microsoft YaHei"/>
-              </a:rPr>
-              <a:t>· 新版命名 _V1 / _V2 递增</a:t>
-            </a:r>
-          </a:p>
-        </p:txBody>
-      </p:sp>
-      <p:sp>
-        <p:nvSpPr>
-          <p:cNvPr id="15" name="TextBox 14"/>
-          <p:cNvSpPr txBox="1"/>
-          <p:nvPr/>
-        </p:nvSpPr>
-        <p:spPr>
-          <a:xfrm>
-            <a:off x="6720840" y="4069079"/>
-            <a:ext cx="4663440" cy="457200"/>
-          </a:xfrm>
-          <a:prstGeom prst="rect">
-            <a:avLst/>
-          </a:prstGeom>
-          <a:noFill/>
-        </p:spPr>
-        <p:txBody>
-          <a:bodyPr wrap="square">
-            <a:spAutoFit/>
-          </a:bodyPr>
-          <a:lstStyle/>
-          <a:p>
-            <a:pPr algn="l"/>
-            <a:r>
-              <a:rPr sz="1500" b="0">
-                <a:solidFill>
-                  <a:srgbClr val="3A3A3A"/>
-                </a:solidFill>
-                <a:latin typeface="Microsoft YaHei"/>
-              </a:rPr>
-              <a:t>· 对比图进 .mavis-compare/</a:t>
-            </a:r>
-          </a:p>
-        </p:txBody>
-      </p:sp>
-    </p:spTree>
-  </p:cSld>
-  <p:clrMapOvr>
-    <a:masterClrMapping/>
-  </p:clrMapOvr>
-</p:sld>
-</file>
-
-<file path=ppt/slides/slide5.xml><?xml version="1.0" encoding="utf-8"?>
-<p:sld xmlns:a="http://schemas.openxmlformats.org/drawingml/2006/main" xmlns:p="http://schemas.openxmlformats.org/presentationml/2006/main" xmlns:r="http://schemas.openxmlformats.org/officeDocument/2006/relationships">
-  <p:cSld>
-    <p:spTree>
-      <p:nvGrpSpPr>
-        <p:cNvPr id="1" name=""/>
-        <p:cNvGrpSpPr/>
-        <p:nvPr/>
-      </p:nvGrpSpPr>
-      <p:grpSpPr/>
-      <p:sp>
-        <p:nvSpPr>
-          <p:cNvPr id="2" name="Rectangle 1"/>
-          <p:cNvSpPr/>
-          <p:nvPr/>
-        </p:nvSpPr>
-        <p:spPr>
-          <a:xfrm>
-            <a:off x="0" y="0"/>
-            <a:ext cx="12191695" cy="6858000"/>
-          </a:xfrm>
-          <a:prstGeom prst="rect">
-            <a:avLst/>
-          </a:prstGeom>
-          <a:solidFill>
-            <a:srgbClr val="1B2A3A"/>
-          </a:solidFill>
-          <a:ln>
-            <a:noFill/>
-          </a:ln>
-          <a:effectLst/>
-        </p:spPr>
-        <p:style>
-          <a:lnRef idx="1">
-            <a:schemeClr val="accent1"/>
-          </a:lnRef>
-          <a:fillRef idx="3">
-            <a:schemeClr val="accent1"/>
-          </a:fillRef>
-          <a:effectRef idx="2">
-            <a:schemeClr val="accent1"/>
-          </a:effectRef>
-          <a:fontRef idx="minor">
-            <a:schemeClr val="lt1"/>
-          </a:fontRef>
-        </p:style>
-        <p:txBody>
-          <a:bodyPr rtlCol="0" anchor="ctr"/>
-          <a:lstStyle/>
-          <a:p>
-            <a:pPr algn="ctr"/>
-          </a:p>
-        </p:txBody>
-      </p:sp>
-      <p:pic>
-        <p:nvPicPr>
-          <p:cNvPr id="3" name="Picture 2" descr="demo_photo.png"/>
-          <p:cNvPicPr>
-            <a:picLocks noChangeAspect="1"/>
-          </p:cNvPicPr>
-          <p:nvPr/>
-        </p:nvPicPr>
-        <p:blipFill>
-          <a:blip r:embed="rId2"/>
-          <a:stretch>
-            <a:fillRect/>
-          </a:stretch>
-        </p:blipFill>
-        <p:spPr>
-          <a:xfrm>
-            <a:off x="7680960" y="0"/>
-            <a:ext cx="4876800" cy="6858000"/>
-          </a:xfrm>
-          <a:prstGeom prst="rect">
-            <a:avLst/>
-          </a:prstGeom>
-        </p:spPr>
-      </p:pic>
-      <p:sp>
-        <p:nvSpPr>
-          <p:cNvPr id="4" name="TextBox 3"/>
-          <p:cNvSpPr txBox="1"/>
-          <p:nvPr/>
-        </p:nvSpPr>
-        <p:spPr>
-          <a:xfrm>
-            <a:off x="822960" y="1371600"/>
-            <a:ext cx="6035040" cy="1645920"/>
-          </a:xfrm>
-          <a:prstGeom prst="rect">
-            <a:avLst/>
-          </a:prstGeom>
-          <a:noFill/>
-        </p:spPr>
-        <p:txBody>
-          <a:bodyPr wrap="square">
-            <a:spAutoFit/>
-          </a:bodyPr>
-          <a:lstStyle/>
-          <a:p>
-            <a:pPr algn="l"/>
-            <a:r>
-              <a:rPr sz="7200" b="1">
-                <a:solidFill>
-                  <a:srgbClr val="9E2A25"/>
-                </a:solidFill>
-                <a:latin typeface="Microsoft YaHei"/>
-              </a:rPr>
-              <a:t>03</a:t>
-            </a:r>
-          </a:p>
-        </p:txBody>
-      </p:sp>
-      <p:sp>
-        <p:nvSpPr>
-          <p:cNvPr id="5" name="TextBox 4"/>
-          <p:cNvSpPr txBox="1"/>
-          <p:nvPr/>
-        </p:nvSpPr>
-        <p:spPr>
-          <a:xfrm>
-            <a:off x="868680" y="2743200"/>
-            <a:ext cx="6217920" cy="548640"/>
-          </a:xfrm>
-          <a:prstGeom prst="rect">
-            <a:avLst/>
-          </a:prstGeom>
-          <a:noFill/>
-        </p:spPr>
-        <p:txBody>
-          <a:bodyPr wrap="square">
-            <a:spAutoFit/>
-          </a:bodyPr>
-          <a:lstStyle/>
-          <a:p>
-            <a:pPr algn="l"/>
-            <a:r>
-              <a:rPr sz="3000" b="1">
-                <a:solidFill>
-                  <a:srgbClr val="FFFFFF"/>
-                </a:solidFill>
-                <a:latin typeface="Microsoft YaHei"/>
-              </a:rPr>
-              <a:t>效果一览</a:t>
-            </a:r>
-          </a:p>
-        </p:txBody>
-      </p:sp>
-      <p:sp>
-        <p:nvSpPr>
-          <p:cNvPr id="6" name="TextBox 5"/>
-          <p:cNvSpPr txBox="1"/>
-          <p:nvPr/>
-        </p:nvSpPr>
-        <p:spPr>
-          <a:xfrm>
-            <a:off x="868680" y="3566160"/>
-            <a:ext cx="6217920" cy="1280160"/>
-          </a:xfrm>
-          <a:prstGeom prst="rect">
-            <a:avLst/>
-          </a:prstGeom>
-          <a:noFill/>
-        </p:spPr>
-        <p:txBody>
-          <a:bodyPr wrap="square">
-            <a:spAutoFit/>
-          </a:bodyPr>
-          <a:lstStyle/>
-          <a:p>
-            <a:pPr algn="l"/>
-            <a:r>
-              <a:rPr sz="1500" b="0">
-                <a:solidFill>
-                  <a:srgbClr val="C9D4E0"/>
-                </a:solidFill>
-                <a:latin typeface="Microsoft YaHei"/>
-              </a:rPr>
-              <a:t>演示页：图与文同屏
-用于验证图文混排页的还原度</a:t>
-            </a:r>
-          </a:p>
-        </p:txBody>
-      </p:sp>
-    </p:spTree>
-  </p:cSld>
-  <p:clrMapOvr>
-    <a:masterClrMapping/>
-  </p:clrMapOvr>
-</p:sld>
-</file>
-
-<file path=ppt/slides/slide6.xml><?xml version="1.0" encoding="utf-8"?>
-<p:sld xmlns:a="http://schemas.openxmlformats.org/drawingml/2006/main" xmlns:p="http://schemas.openxmlformats.org/presentationml/2006/main" xmlns:r="http://schemas.openxmlformats.org/officeDocument/2006/relationships">
-  <p:cSld>
-    <p:spTree>
-      <p:nvGrpSpPr>
-        <p:cNvPr id="1" name=""/>
-        <p:cNvGrpSpPr/>
-        <p:nvPr/>
-      </p:nvGrpSpPr>
-      <p:grpSpPr/>
-      <p:sp>
-        <p:nvSpPr>
-          <p:cNvPr id="2" name="Rectangle 1"/>
-          <p:cNvSpPr/>
-          <p:nvPr/>
-        </p:nvSpPr>
-        <p:spPr>
-          <a:xfrm>
-            <a:off x="0" y="0"/>
-            <a:ext cx="12191695" cy="6858000"/>
-          </a:xfrm>
-          <a:prstGeom prst="rect">
-            <a:avLst/>
-          </a:prstGeom>
-          <a:solidFill>
-            <a:srgbClr val="1B2A3A"/>
-          </a:solidFill>
-          <a:ln>
-            <a:noFill/>
-          </a:ln>
-          <a:effectLst/>
-        </p:spPr>
-        <p:style>
-          <a:lnRef idx="1">
-            <a:schemeClr val="accent1"/>
-          </a:lnRef>
-          <a:fillRef idx="3">
-            <a:schemeClr val="accent1"/>
-          </a:fillRef>
-          <a:effectRef idx="2">
-            <a:schemeClr val="accent1"/>
-          </a:effectRef>
-          <a:fontRef idx="minor">
-            <a:schemeClr val="lt1"/>
-          </a:fontRef>
-        </p:style>
-        <p:txBody>
-          <a:bodyPr rtlCol="0" anchor="ctr"/>
-          <a:lstStyle/>
-          <a:p>
-            <a:pPr algn="ctr"/>
-          </a:p>
-        </p:txBody>
-      </p:sp>
-      <p:sp>
-        <p:nvSpPr>
-          <p:cNvPr id="3" name="TextBox 2"/>
-          <p:cNvSpPr txBox="1"/>
-          <p:nvPr/>
-        </p:nvSpPr>
-        <p:spPr>
-          <a:xfrm>
-            <a:off x="822960" y="685800"/>
-            <a:ext cx="7315200" cy="731520"/>
-          </a:xfrm>
-          <a:prstGeom prst="rect">
-            <a:avLst/>
-          </a:prstGeom>
-          <a:noFill/>
-        </p:spPr>
-        <p:txBody>
-          <a:bodyPr wrap="square">
-            <a:spAutoFit/>
-          </a:bodyPr>
-          <a:lstStyle/>
-          <a:p>
-            <a:pPr algn="l"/>
-            <a:r>
-              <a:rPr sz="1500" b="1">
-                <a:solidFill>
-                  <a:srgbClr val="9E2A25"/>
-                </a:solidFill>
-                <a:latin typeface="Microsoft YaHei"/>
-              </a:rPr>
-              <a:t>小结  SUMMARY</a:t>
-            </a:r>
-          </a:p>
-        </p:txBody>
-      </p:sp>
-      <p:sp>
-        <p:nvSpPr>
-          <p:cNvPr id="4" name="TextBox 3"/>
-          <p:cNvSpPr txBox="1"/>
-          <p:nvPr/>
-        </p:nvSpPr>
-        <p:spPr>
-          <a:xfrm>
-            <a:off x="822960" y="1097280"/>
-            <a:ext cx="8229600" cy="640080"/>
-          </a:xfrm>
-          <a:prstGeom prst="rect">
-            <a:avLst/>
-          </a:prstGeom>
-          <a:noFill/>
-        </p:spPr>
-        <p:txBody>
-          <a:bodyPr wrap="square">
-            <a:spAutoFit/>
-          </a:bodyPr>
-          <a:lstStyle/>
-          <a:p>
-            <a:pPr algn="l"/>
-            <a:r>
-              <a:rPr sz="3200" b="1">
-                <a:solidFill>
-                  <a:srgbClr val="FFFFFF"/>
-                </a:solidFill>
-                <a:latin typeface="Microsoft YaHei"/>
-              </a:rPr>
-              <a:t>四件被记住的事</a:t>
-            </a:r>
-          </a:p>
-        </p:txBody>
-      </p:sp>
-      <p:sp>
-        <p:nvSpPr>
-          <p:cNvPr id="5" name="TextBox 4"/>
-          <p:cNvSpPr txBox="1"/>
-          <p:nvPr/>
-        </p:nvSpPr>
-        <p:spPr>
-          <a:xfrm>
-            <a:off x="868680" y="2148840"/>
-            <a:ext cx="2743200" cy="457200"/>
-          </a:xfrm>
-          <a:prstGeom prst="rect">
-            <a:avLst/>
-          </a:prstGeom>
-          <a:noFill/>
-        </p:spPr>
-        <p:txBody>
-          <a:bodyPr wrap="square">
-            <a:spAutoFit/>
-          </a:bodyPr>
-          <a:lstStyle/>
-          <a:p>
-            <a:pPr algn="l"/>
-            <a:r>
-              <a:rPr sz="1900" b="1">
-                <a:solidFill>
-                  <a:srgbClr val="9E2A25"/>
-                </a:solidFill>
-                <a:latin typeface="Microsoft YaHei"/>
-              </a:rPr>
-              <a:t>原版不动</a:t>
-            </a:r>
-          </a:p>
-        </p:txBody>
-      </p:sp>
-      <p:sp>
-        <p:nvSpPr>
-          <p:cNvPr id="6" name="TextBox 5"/>
-          <p:cNvSpPr txBox="1"/>
-          <p:nvPr/>
-        </p:nvSpPr>
-        <p:spPr>
-          <a:xfrm>
-            <a:off x="3657600" y="2194560"/>
-            <a:ext cx="6400800" cy="457200"/>
-          </a:xfrm>
-          <a:prstGeom prst="rect">
-            <a:avLst/>
-          </a:prstGeom>
-          <a:noFill/>
-        </p:spPr>
-        <p:txBody>
-          <a:bodyPr wrap="square">
-            <a:spAutoFit/>
-          </a:bodyPr>
-          <a:lstStyle/>
-          <a:p>
-            <a:pPr algn="l"/>
-            <a:r>
-              <a:rPr sz="1500" b="0">
-                <a:solidFill>
-                  <a:srgbClr val="C9D4E0"/>
-                </a:solidFill>
-                <a:latin typeface="Microsoft YaHei"/>
-              </a:rPr>
-              <a:t>V0 永远是原始状态</a:t>
-            </a:r>
-          </a:p>
-        </p:txBody>
-      </p:sp>
-      <p:sp>
-        <p:nvSpPr>
-          <p:cNvPr id="7" name="TextBox 6"/>
-          <p:cNvSpPr txBox="1"/>
-          <p:nvPr/>
-        </p:nvSpPr>
-        <p:spPr>
-          <a:xfrm>
-            <a:off x="868680" y="3017520"/>
-            <a:ext cx="2743200" cy="457200"/>
-          </a:xfrm>
-          <a:prstGeom prst="rect">
-            <a:avLst/>
-          </a:prstGeom>
-          <a:noFill/>
-        </p:spPr>
-        <p:txBody>
-          <a:bodyPr wrap="square">
-            <a:spAutoFit/>
-          </a:bodyPr>
-          <a:lstStyle/>
-          <a:p>
-            <a:pPr algn="l"/>
-            <a:r>
-              <a:rPr sz="1900" b="1">
-                <a:solidFill>
-                  <a:srgbClr val="9E2A25"/>
-                </a:solidFill>
-                <a:latin typeface="Microsoft YaHei"/>
-              </a:rPr>
-              <a:t>版本递增</a:t>
-            </a:r>
-          </a:p>
-        </p:txBody>
-      </p:sp>
-      <p:sp>
-        <p:nvSpPr>
-          <p:cNvPr id="8" name="TextBox 7"/>
-          <p:cNvSpPr txBox="1"/>
-          <p:nvPr/>
-        </p:nvSpPr>
-        <p:spPr>
-          <a:xfrm>
-            <a:off x="3657600" y="3063239"/>
-            <a:ext cx="6400800" cy="457200"/>
-          </a:xfrm>
-          <a:prstGeom prst="rect">
-            <a:avLst/>
-          </a:prstGeom>
-          <a:noFill/>
-        </p:spPr>
-        <p:txBody>
-          <a:bodyPr wrap="square">
-            <a:spAutoFit/>
-          </a:bodyPr>
-          <a:lstStyle/>
-          <a:p>
-            <a:pPr algn="l"/>
-            <a:r>
-              <a:rPr sz="1500" b="0">
-                <a:solidFill>
-                  <a:srgbClr val="C9D4E0"/>
-                </a:solidFill>
-                <a:latin typeface="Microsoft YaHei"/>
-              </a:rPr>
-              <a:t>_V1 / _V2 不覆盖</a:t>
-            </a:r>
-          </a:p>
-        </p:txBody>
-      </p:sp>
-      <p:sp>
-        <p:nvSpPr>
-          <p:cNvPr id="9" name="TextBox 8"/>
-          <p:cNvSpPr txBox="1"/>
-          <p:nvPr/>
-        </p:nvSpPr>
-        <p:spPr>
-          <a:xfrm>
-            <a:off x="868680" y="3886200"/>
-            <a:ext cx="2743200" cy="457200"/>
-          </a:xfrm>
-          <a:prstGeom prst="rect">
-            <a:avLst/>
-          </a:prstGeom>
-          <a:noFill/>
-        </p:spPr>
-        <p:txBody>
-          <a:bodyPr wrap="square">
-            <a:spAutoFit/>
-          </a:bodyPr>
-          <a:lstStyle/>
-          <a:p>
-            <a:pPr algn="l"/>
-            <a:r>
-              <a:rPr sz="1900" b="1">
-                <a:solidFill>
-                  <a:srgbClr val="9E2A25"/>
-                </a:solidFill>
-                <a:latin typeface="Microsoft YaHei"/>
-              </a:rPr>
-              <a:t>图先于话</a:t>
-            </a:r>
-          </a:p>
-        </p:txBody>
-      </p:sp>
-      <p:sp>
-        <p:nvSpPr>
-          <p:cNvPr id="10" name="TextBox 9"/>
-          <p:cNvSpPr txBox="1"/>
-          <p:nvPr/>
-        </p:nvSpPr>
-        <p:spPr>
-          <a:xfrm>
-            <a:off x="3657600" y="3931920"/>
-            <a:ext cx="6400800" cy="457200"/>
-          </a:xfrm>
-          <a:prstGeom prst="rect">
-            <a:avLst/>
-          </a:prstGeom>
-          <a:noFill/>
-        </p:spPr>
-        <p:txBody>
-          <a:bodyPr wrap="square">
-            <a:spAutoFit/>
-          </a:bodyPr>
-          <a:lstStyle/>
-          <a:p>
-            <a:pPr algn="l"/>
-            <a:r>
-              <a:rPr sz="1500" b="0">
-                <a:solidFill>
-                  <a:srgbClr val="C9D4E0"/>
-                </a:solidFill>
-                <a:latin typeface="Microsoft YaHei"/>
-              </a:rPr>
-              <a:t>对比图 + 汇总表</a:t>
-            </a:r>
-          </a:p>
-        </p:txBody>
-      </p:sp>
-      <p:sp>
-        <p:nvSpPr>
-          <p:cNvPr id="11" name="TextBox 10"/>
-          <p:cNvSpPr txBox="1"/>
-          <p:nvPr/>
-        </p:nvSpPr>
-        <p:spPr>
-          <a:xfrm>
-            <a:off x="868680" y="4754879"/>
-            <a:ext cx="2743200" cy="457200"/>
-          </a:xfrm>
-          <a:prstGeom prst="rect">
-            <a:avLst/>
-          </a:prstGeom>
-          <a:noFill/>
-        </p:spPr>
-        <p:txBody>
-          <a:bodyPr wrap="square">
-            <a:spAutoFit/>
-          </a:bodyPr>
-          <a:lstStyle/>
-          <a:p>
-            <a:pPr algn="l"/>
-            <a:r>
-              <a:rPr sz="1900" b="1">
-                <a:solidFill>
-                  <a:srgbClr val="9E2A25"/>
-                </a:solidFill>
-                <a:latin typeface="Microsoft YaHei"/>
-              </a:rPr>
-              <a:t>可复核</a:t>
-            </a:r>
-          </a:p>
-        </p:txBody>
-      </p:sp>
-      <p:sp>
-        <p:nvSpPr>
-          <p:cNvPr id="12" name="TextBox 11"/>
-          <p:cNvSpPr txBox="1"/>
-          <p:nvPr/>
-        </p:nvSpPr>
-        <p:spPr>
-          <a:xfrm>
-            <a:off x="3657600" y="4800599"/>
-            <a:ext cx="6400800" cy="457200"/>
-          </a:xfrm>
-          <a:prstGeom prst="rect">
-            <a:avLst/>
-          </a:prstGeom>
-          <a:noFill/>
-        </p:spPr>
-        <p:txBody>
-          <a:bodyPr wrap="square">
-            <a:spAutoFit/>
-          </a:bodyPr>
-          <a:lstStyle/>
-          <a:p>
-            <a:pPr algn="l"/>
-            <a:r>
-              <a:rPr sz="1500" b="0">
-                <a:solidFill>
-                  <a:srgbClr val="C9D4E0"/>
-                </a:solidFill>
-                <a:latin typeface="Microsoft YaHei"/>
-              </a:rPr>
-              <a:t>哈希与页码随交付给出</a:t>
+              <a:t>收尾固定给：版本链表格  +  每个改动文件一张对比图  +  改动摘要</a:t>
             </a:r>
           </a:p>
         </p:txBody>
